--- a/examples/consulting-ai-transformation/run/slides/s01-recommendation/deliverables/slide.pptx
+++ b/examples/consulting-ai-transformation/run/slides/s01-recommendation/deliverables/slide.pptx
@@ -506,7 +506,10 @@
 The 95% gate applies to a sampled test set. Each client release separately requires expert verification and engagement-lead approval.
 At least 11 of 15 pilot users must be weekly active. One comparable research task is measured per pilot engagement.
 [SlidePoise sources]
-Generated target visual: /Users/henry/Codes/AI_slide_drafting/output/showcase-revisions/consulting-v3-authoring/slides/s01-recommendation/work/accepted-slide.png</a:t>
+Generated target visual: /private/tmp/.slidepoise-rebuild-h51errnw/slides/s01-recommendation/work/accepted-slide.png
+Canonical asset remix-focus-2-line: /Users/henry/Codes/AI_slide_drafting/examples/consulting-ai-transformation/run/work/icon-cache/focus-2/remix-focus-2-line.svg
+Canonical asset remix-team-line: /Users/henry/Codes/AI_slide_drafting/examples/consulting-ai-transformation/run/work/icon-cache/team/remix-team-line.svg
+Canonical asset remix-shield-check-line: /Users/henry/Codes/AI_slide_drafting/examples/consulting-ai-transformation/run/work/icon-cache/shield-check/remix-shield-check-line.svg</a:t>
             </a:r>
             <a:endParaRPr lang="en-US" dirty="0"/>
           </a:p>
@@ -1220,20 +1223,20 @@
       </p:grpSpPr>
       <p:sp>
         <p:nvSpPr>
-          <p:cNvPr id="2" name="introduction-rule"/>
+          <p:cNvPr id="2" name="metric-divider-1"/>
           <p:cNvSpPr/>
           <p:nvPr/>
         </p:nvSpPr>
         <p:spPr>
           <a:xfrm>
-            <a:off x="304800" y="1454150"/>
-            <a:ext cx="11582400" cy="12700"/>
+            <a:off x="4108450" y="1524000"/>
+            <a:ext cx="6350" cy="876300"/>
           </a:xfrm>
           <a:prstGeom prst="rect">
             <a:avLst/>
           </a:prstGeom>
           <a:solidFill>
-            <a:srgbClr val="AAAAAA"/>
+            <a:srgbClr val="D0D0D0"/>
           </a:solidFill>
           <a:ln w="12700">
             <a:solidFill>
@@ -1247,20 +1250,20 @@
       </p:sp>
       <p:sp>
         <p:nvSpPr>
-          <p:cNvPr id="3" name="metric-divider-1"/>
+          <p:cNvPr id="3" name="metric-divider-2"/>
           <p:cNvSpPr/>
           <p:nvPr/>
         </p:nvSpPr>
         <p:spPr>
           <a:xfrm>
-            <a:off x="298450" y="3251200"/>
-            <a:ext cx="3371850" cy="6350"/>
+            <a:off x="8210550" y="1524000"/>
+            <a:ext cx="6350" cy="876300"/>
           </a:xfrm>
           <a:prstGeom prst="rect">
             <a:avLst/>
           </a:prstGeom>
           <a:solidFill>
-            <a:srgbClr val="B6B6B6"/>
+            <a:srgbClr val="D0D0D0"/>
           </a:solidFill>
           <a:ln w="12700">
             <a:solidFill>
@@ -1274,95 +1277,14 @@
       </p:sp>
       <p:sp>
         <p:nvSpPr>
-          <p:cNvPr id="4" name="metric-divider-2"/>
+          <p:cNvPr id="4" name="decision-band"/>
           <p:cNvSpPr/>
           <p:nvPr/>
         </p:nvSpPr>
         <p:spPr>
           <a:xfrm>
-            <a:off x="298450" y="4387850"/>
-            <a:ext cx="3371850" cy="6350"/>
-          </a:xfrm>
-          <a:prstGeom prst="rect">
-            <a:avLst/>
-          </a:prstGeom>
-          <a:solidFill>
-            <a:srgbClr val="B6B6B6"/>
-          </a:solidFill>
-          <a:ln w="12700">
-            <a:solidFill>
-              <a:srgbClr val="FFFFFF">
-                <a:alpha val="0"/>
-              </a:srgbClr>
-            </a:solidFill>
-            <a:prstDash val="solid"/>
-          </a:ln>
-        </p:spPr>
-      </p:sp>
-      <p:sp>
-        <p:nvSpPr>
-          <p:cNvPr id="5" name="argument-divider-1"/>
-          <p:cNvSpPr/>
-          <p:nvPr/>
-        </p:nvSpPr>
-        <p:spPr>
-          <a:xfrm>
-            <a:off x="4451350" y="3251200"/>
-            <a:ext cx="2787650" cy="6350"/>
-          </a:xfrm>
-          <a:prstGeom prst="rect">
-            <a:avLst/>
-          </a:prstGeom>
-          <a:solidFill>
-            <a:srgbClr val="B6B6B6"/>
-          </a:solidFill>
-          <a:ln w="12700">
-            <a:solidFill>
-              <a:srgbClr val="FFFFFF">
-                <a:alpha val="0"/>
-              </a:srgbClr>
-            </a:solidFill>
-            <a:prstDash val="solid"/>
-          </a:ln>
-        </p:spPr>
-      </p:sp>
-      <p:sp>
-        <p:nvSpPr>
-          <p:cNvPr id="6" name="argument-divider-2"/>
-          <p:cNvSpPr/>
-          <p:nvPr/>
-        </p:nvSpPr>
-        <p:spPr>
-          <a:xfrm>
-            <a:off x="4451350" y="4387850"/>
-            <a:ext cx="2787650" cy="6350"/>
-          </a:xfrm>
-          <a:prstGeom prst="rect">
-            <a:avLst/>
-          </a:prstGeom>
-          <a:solidFill>
-            <a:srgbClr val="B6B6B6"/>
-          </a:solidFill>
-          <a:ln w="12700">
-            <a:solidFill>
-              <a:srgbClr val="FFFFFF">
-                <a:alpha val="0"/>
-              </a:srgbClr>
-            </a:solidFill>
-            <a:prstDash val="solid"/>
-          </a:ln>
-        </p:spPr>
-      </p:sp>
-      <p:sp>
-        <p:nvSpPr>
-          <p:cNvPr id="7" name="decision-band"/>
-          <p:cNvSpPr/>
-          <p:nvPr/>
-        </p:nvSpPr>
-        <p:spPr>
-          <a:xfrm>
-            <a:off x="304800" y="5441950"/>
-            <a:ext cx="11582400" cy="850900"/>
+            <a:off x="292100" y="5708650"/>
+            <a:ext cx="11607800" cy="590550"/>
           </a:xfrm>
           <a:prstGeom prst="rect">
             <a:avLst/>
@@ -1382,14 +1304,14 @@
       </p:sp>
       <p:sp>
         <p:nvSpPr>
-          <p:cNvPr id="8" name="decision-accent"/>
+          <p:cNvPr id="5" name="decision-accent"/>
           <p:cNvSpPr/>
           <p:nvPr/>
         </p:nvSpPr>
         <p:spPr>
           <a:xfrm>
-            <a:off x="304800" y="5441950"/>
-            <a:ext cx="50800" cy="850900"/>
+            <a:off x="292100" y="5708650"/>
+            <a:ext cx="50800" cy="590550"/>
           </a:xfrm>
           <a:prstGeom prst="rect">
             <a:avLst/>
@@ -1409,7 +1331,7 @@
       </p:sp>
       <p:graphicFrame>
         <p:nvGraphicFramePr>
-          <p:cNvPr id="9" name="scale-gate-table"/>
+          <p:cNvPr id="6" name="scale-gate-table"/>
           <p:cNvGraphicFramePr>
             <a:graphicFrameLocks noGrp="1"/>
           </p:cNvGraphicFramePr>
@@ -1422,18 +1344,18 @@
           </p:nvPr>
         </p:nvGraphicFramePr>
         <p:xfrm>
-          <a:off x="7772400" y="2235200"/>
-          <a:ext cx="4121150" cy="3003550"/>
+          <a:off x="6781800" y="2959100"/>
+          <a:ext cx="5080000" cy="2108200"/>
         </p:xfrm>
         <a:graphic>
           <a:graphicData uri="http://schemas.openxmlformats.org/drawingml/2006/table">
             <a:tbl>
               <a:tblPr/>
               <a:tblGrid>
-                <a:gridCol w="2273300"/>
-                <a:gridCol w="1847850"/>
+                <a:gridCol w="2794000"/>
+                <a:gridCol w="2286000"/>
               </a:tblGrid>
-              <a:tr h="533400">
+              <a:tr h="342900">
                 <a:tc>
                   <a:txBody>
                     <a:bodyPr>
@@ -1445,7 +1367,7 @@
                         <a:buNone/>
                       </a:pPr>
                       <a:r>
-                        <a:rPr lang="en-US" sz="1200" b="1" dirty="0">
+                        <a:rPr lang="en-US" sz="1100" b="1" dirty="0">
                           <a:solidFill>
                             <a:srgbClr val="FFFFFF"/>
                           </a:solidFill>
@@ -1455,17 +1377,17 @@
                         </a:rPr>
                         <a:t>Measure</a:t>
                       </a:r>
-                      <a:endParaRPr lang="en-US" sz="1200" dirty="0">
+                      <a:endParaRPr lang="en-US" sz="1100" dirty="0">
                         <a:latin typeface="Arial" charset="0"/>
                         <a:ea typeface="Arial" charset="0"/>
                         <a:cs typeface="Arial" charset="0"/>
                       </a:endParaRPr>
                     </a:p>
                   </a:txBody>
-                  <a:tcPr marL="127000" marR="127000" marT="127000" marB="127000" anchor="ctr">
+                  <a:tcPr marL="101600" marR="101600" marT="38100" marB="38100" anchor="ctr">
                     <a:lnL w="6350" cap="flat" cmpd="sng" algn="ctr">
                       <a:solidFill>
-                        <a:srgbClr val="B5B5B5"/>
+                        <a:srgbClr val="C6C9CD"/>
                       </a:solidFill>
                       <a:prstDash val="solid"/>
                       <a:round/>
@@ -1474,7 +1396,7 @@
                     </a:lnL>
                     <a:lnR w="6350" cap="flat" cmpd="sng" algn="ctr">
                       <a:solidFill>
-                        <a:srgbClr val="B5B5B5"/>
+                        <a:srgbClr val="C6C9CD"/>
                       </a:solidFill>
                       <a:prstDash val="solid"/>
                       <a:round/>
@@ -1483,7 +1405,7 @@
                     </a:lnR>
                     <a:lnT w="6350" cap="flat" cmpd="sng" algn="ctr">
                       <a:solidFill>
-                        <a:srgbClr val="B5B5B5"/>
+                        <a:srgbClr val="C6C9CD"/>
                       </a:solidFill>
                       <a:prstDash val="solid"/>
                       <a:round/>
@@ -1492,7 +1414,7 @@
                     </a:lnT>
                     <a:lnB w="6350" cap="flat" cmpd="sng" algn="ctr">
                       <a:solidFill>
-                        <a:srgbClr val="B5B5B5"/>
+                        <a:srgbClr val="C6C9CD"/>
                       </a:solidFill>
                       <a:prstDash val="solid"/>
                       <a:round/>
@@ -1511,11 +1433,11 @@
                     </a:bodyPr>
                     <a:lstStyle/>
                     <a:p>
-                      <a:pPr algn="l" indent="0" marL="0">
+                      <a:pPr algn="ctr" indent="0" marL="0">
                         <a:buNone/>
                       </a:pPr>
                       <a:r>
-                        <a:rPr lang="en-US" sz="1200" b="1" dirty="0">
+                        <a:rPr lang="en-US" sz="1100" b="1" dirty="0">
                           <a:solidFill>
                             <a:srgbClr val="FFFFFF"/>
                           </a:solidFill>
@@ -1525,17 +1447,17 @@
                         </a:rPr>
                         <a:t>Minimum to scale</a:t>
                       </a:r>
-                      <a:endParaRPr lang="en-US" sz="1200" dirty="0">
+                      <a:endParaRPr lang="en-US" sz="1100" dirty="0">
                         <a:latin typeface="Arial" charset="0"/>
                         <a:ea typeface="Arial" charset="0"/>
                         <a:cs typeface="Arial" charset="0"/>
                       </a:endParaRPr>
                     </a:p>
                   </a:txBody>
-                  <a:tcPr marL="127000" marR="127000" marT="127000" marB="127000" anchor="ctr">
+                  <a:tcPr marL="101600" marR="101600" marT="38100" marB="38100" anchor="ctr">
                     <a:lnL w="6350" cap="flat" cmpd="sng" algn="ctr">
                       <a:solidFill>
-                        <a:srgbClr val="B5B5B5"/>
+                        <a:srgbClr val="C6C9CD"/>
                       </a:solidFill>
                       <a:prstDash val="solid"/>
                       <a:round/>
@@ -1544,7 +1466,7 @@
                     </a:lnL>
                     <a:lnR w="6350" cap="flat" cmpd="sng" algn="ctr">
                       <a:solidFill>
-                        <a:srgbClr val="B5B5B5"/>
+                        <a:srgbClr val="C6C9CD"/>
                       </a:solidFill>
                       <a:prstDash val="solid"/>
                       <a:round/>
@@ -1553,7 +1475,7 @@
                     </a:lnR>
                     <a:lnT w="6350" cap="flat" cmpd="sng" algn="ctr">
                       <a:solidFill>
-                        <a:srgbClr val="B5B5B5"/>
+                        <a:srgbClr val="C6C9CD"/>
                       </a:solidFill>
                       <a:prstDash val="solid"/>
                       <a:round/>
@@ -1562,7 +1484,7 @@
                     </a:lnT>
                     <a:lnB w="6350" cap="flat" cmpd="sng" algn="ctr">
                       <a:solidFill>
-                        <a:srgbClr val="B5B5B5"/>
+                        <a:srgbClr val="C6C9CD"/>
                       </a:solidFill>
                       <a:prstDash val="solid"/>
                       <a:round/>
@@ -1575,7 +1497,7 @@
                   </a:tcPr>
                 </a:tc>
               </a:tr>
-              <a:tr h="609600">
+              <a:tr h="438150">
                 <a:tc>
                   <a:txBody>
                     <a:bodyPr>
@@ -1587,7 +1509,7 @@
                         <a:buNone/>
                       </a:pPr>
                       <a:r>
-                        <a:rPr lang="en-US" sz="1200" b="1" dirty="0">
+                        <a:rPr lang="en-US" sz="1100" b="1" dirty="0">
                           <a:solidFill>
                             <a:srgbClr val="000000"/>
                           </a:solidFill>
@@ -1597,17 +1519,17 @@
                         </a:rPr>
                         <a:t>Cycle-time reduction</a:t>
                       </a:r>
-                      <a:endParaRPr lang="en-US" sz="1200" dirty="0">
+                      <a:endParaRPr lang="en-US" sz="1100" dirty="0">
                         <a:latin typeface="Arial" charset="0"/>
                         <a:ea typeface="Arial" charset="0"/>
                         <a:cs typeface="Arial" charset="0"/>
                       </a:endParaRPr>
                     </a:p>
                   </a:txBody>
-                  <a:tcPr marL="127000" marR="127000" marT="127000" marB="127000" anchor="ctr">
+                  <a:tcPr marL="101600" marR="101600" marT="38100" marB="38100" anchor="ctr">
                     <a:lnL w="6350" cap="flat" cmpd="sng" algn="ctr">
                       <a:solidFill>
-                        <a:srgbClr val="B5B5B5"/>
+                        <a:srgbClr val="C6C9CD"/>
                       </a:solidFill>
                       <a:prstDash val="solid"/>
                       <a:round/>
@@ -1616,7 +1538,7 @@
                     </a:lnL>
                     <a:lnR w="6350" cap="flat" cmpd="sng" algn="ctr">
                       <a:solidFill>
-                        <a:srgbClr val="B5B5B5"/>
+                        <a:srgbClr val="C6C9CD"/>
                       </a:solidFill>
                       <a:prstDash val="solid"/>
                       <a:round/>
@@ -1625,7 +1547,7 @@
                     </a:lnR>
                     <a:lnT w="6350" cap="flat" cmpd="sng" algn="ctr">
                       <a:solidFill>
-                        <a:srgbClr val="B5B5B5"/>
+                        <a:srgbClr val="C6C9CD"/>
                       </a:solidFill>
                       <a:prstDash val="solid"/>
                       <a:round/>
@@ -1634,7 +1556,7 @@
                     </a:lnT>
                     <a:lnB w="6350" cap="flat" cmpd="sng" algn="ctr">
                       <a:solidFill>
-                        <a:srgbClr val="B5B5B5"/>
+                        <a:srgbClr val="C6C9CD"/>
                       </a:solidFill>
                       <a:prstDash val="solid"/>
                       <a:round/>
@@ -1653,11 +1575,11 @@
                     </a:bodyPr>
                     <a:lstStyle/>
                     <a:p>
-                      <a:pPr algn="l" indent="0" marL="0">
+                      <a:pPr algn="ctr" indent="0" marL="0">
                         <a:buNone/>
                       </a:pPr>
                       <a:r>
-                        <a:rPr lang="en-US" sz="1200" dirty="0">
+                        <a:rPr lang="en-US" sz="1100" dirty="0">
                           <a:solidFill>
                             <a:srgbClr val="000000"/>
                           </a:solidFill>
@@ -1667,17 +1589,17 @@
                         </a:rPr>
                         <a:t>25%</a:t>
                       </a:r>
-                      <a:endParaRPr lang="en-US" sz="1200" dirty="0">
+                      <a:endParaRPr lang="en-US" sz="1100" dirty="0">
                         <a:latin typeface="Arial" charset="0"/>
                         <a:ea typeface="Arial" charset="0"/>
                         <a:cs typeface="Arial" charset="0"/>
                       </a:endParaRPr>
                     </a:p>
                   </a:txBody>
-                  <a:tcPr marL="127000" marR="127000" marT="127000" marB="127000" anchor="ctr">
+                  <a:tcPr marL="101600" marR="101600" marT="38100" marB="38100" anchor="ctr">
                     <a:lnL w="6350" cap="flat" cmpd="sng" algn="ctr">
                       <a:solidFill>
-                        <a:srgbClr val="B5B5B5"/>
+                        <a:srgbClr val="C6C9CD"/>
                       </a:solidFill>
                       <a:prstDash val="solid"/>
                       <a:round/>
@@ -1686,7 +1608,7 @@
                     </a:lnL>
                     <a:lnR w="6350" cap="flat" cmpd="sng" algn="ctr">
                       <a:solidFill>
-                        <a:srgbClr val="B5B5B5"/>
+                        <a:srgbClr val="C6C9CD"/>
                       </a:solidFill>
                       <a:prstDash val="solid"/>
                       <a:round/>
@@ -1695,7 +1617,7 @@
                     </a:lnR>
                     <a:lnT w="6350" cap="flat" cmpd="sng" algn="ctr">
                       <a:solidFill>
-                        <a:srgbClr val="B5B5B5"/>
+                        <a:srgbClr val="C6C9CD"/>
                       </a:solidFill>
                       <a:prstDash val="solid"/>
                       <a:round/>
@@ -1704,7 +1626,7 @@
                     </a:lnT>
                     <a:lnB w="6350" cap="flat" cmpd="sng" algn="ctr">
                       <a:solidFill>
-                        <a:srgbClr val="B5B5B5"/>
+                        <a:srgbClr val="C6C9CD"/>
                       </a:solidFill>
                       <a:prstDash val="solid"/>
                       <a:round/>
@@ -1717,7 +1639,7 @@
                   </a:tcPr>
                 </a:tc>
               </a:tr>
-              <a:tr h="615950">
+              <a:tr h="438150">
                 <a:tc>
                   <a:txBody>
                     <a:bodyPr>
@@ -1729,7 +1651,7 @@
                         <a:buNone/>
                       </a:pPr>
                       <a:r>
-                        <a:rPr lang="en-US" sz="1200" b="1" dirty="0">
+                        <a:rPr lang="en-US" sz="1100" b="1" dirty="0">
                           <a:solidFill>
                             <a:srgbClr val="000000"/>
                           </a:solidFill>
@@ -1739,17 +1661,17 @@
                         </a:rPr>
                         <a:t>Sampled cited claims verified</a:t>
                       </a:r>
-                      <a:endParaRPr lang="en-US" sz="1200" dirty="0">
+                      <a:endParaRPr lang="en-US" sz="1100" dirty="0">
                         <a:latin typeface="Arial" charset="0"/>
                         <a:ea typeface="Arial" charset="0"/>
                         <a:cs typeface="Arial" charset="0"/>
                       </a:endParaRPr>
                     </a:p>
                   </a:txBody>
-                  <a:tcPr marL="127000" marR="127000" marT="127000" marB="127000" anchor="ctr">
+                  <a:tcPr marL="101600" marR="101600" marT="38100" marB="38100" anchor="ctr">
                     <a:lnL w="6350" cap="flat" cmpd="sng" algn="ctr">
                       <a:solidFill>
-                        <a:srgbClr val="B5B5B5"/>
+                        <a:srgbClr val="C6C9CD"/>
                       </a:solidFill>
                       <a:prstDash val="solid"/>
                       <a:round/>
@@ -1758,7 +1680,7 @@
                     </a:lnL>
                     <a:lnR w="6350" cap="flat" cmpd="sng" algn="ctr">
                       <a:solidFill>
-                        <a:srgbClr val="B5B5B5"/>
+                        <a:srgbClr val="C6C9CD"/>
                       </a:solidFill>
                       <a:prstDash val="solid"/>
                       <a:round/>
@@ -1767,7 +1689,7 @@
                     </a:lnR>
                     <a:lnT w="6350" cap="flat" cmpd="sng" algn="ctr">
                       <a:solidFill>
-                        <a:srgbClr val="B5B5B5"/>
+                        <a:srgbClr val="C6C9CD"/>
                       </a:solidFill>
                       <a:prstDash val="solid"/>
                       <a:round/>
@@ -1776,7 +1698,7 @@
                     </a:lnT>
                     <a:lnB w="6350" cap="flat" cmpd="sng" algn="ctr">
                       <a:solidFill>
-                        <a:srgbClr val="B5B5B5"/>
+                        <a:srgbClr val="C6C9CD"/>
                       </a:solidFill>
                       <a:prstDash val="solid"/>
                       <a:round/>
@@ -1795,11 +1717,11 @@
                     </a:bodyPr>
                     <a:lstStyle/>
                     <a:p>
-                      <a:pPr algn="l" indent="0" marL="0">
+                      <a:pPr algn="ctr" indent="0" marL="0">
                         <a:buNone/>
                       </a:pPr>
                       <a:r>
-                        <a:rPr lang="en-US" sz="1200" dirty="0">
+                        <a:rPr lang="en-US" sz="1100" dirty="0">
                           <a:solidFill>
                             <a:srgbClr val="000000"/>
                           </a:solidFill>
@@ -1809,17 +1731,17 @@
                         </a:rPr>
                         <a:t>95%</a:t>
                       </a:r>
-                      <a:endParaRPr lang="en-US" sz="1200" dirty="0">
+                      <a:endParaRPr lang="en-US" sz="1100" dirty="0">
                         <a:latin typeface="Arial" charset="0"/>
                         <a:ea typeface="Arial" charset="0"/>
                         <a:cs typeface="Arial" charset="0"/>
                       </a:endParaRPr>
                     </a:p>
                   </a:txBody>
-                  <a:tcPr marL="127000" marR="127000" marT="127000" marB="127000" anchor="ctr">
+                  <a:tcPr marL="101600" marR="101600" marT="38100" marB="38100" anchor="ctr">
                     <a:lnL w="6350" cap="flat" cmpd="sng" algn="ctr">
                       <a:solidFill>
-                        <a:srgbClr val="B5B5B5"/>
+                        <a:srgbClr val="C6C9CD"/>
                       </a:solidFill>
                       <a:prstDash val="solid"/>
                       <a:round/>
@@ -1828,7 +1750,7 @@
                     </a:lnL>
                     <a:lnR w="6350" cap="flat" cmpd="sng" algn="ctr">
                       <a:solidFill>
-                        <a:srgbClr val="B5B5B5"/>
+                        <a:srgbClr val="C6C9CD"/>
                       </a:solidFill>
                       <a:prstDash val="solid"/>
                       <a:round/>
@@ -1837,7 +1759,7 @@
                     </a:lnR>
                     <a:lnT w="6350" cap="flat" cmpd="sng" algn="ctr">
                       <a:solidFill>
-                        <a:srgbClr val="B5B5B5"/>
+                        <a:srgbClr val="C6C9CD"/>
                       </a:solidFill>
                       <a:prstDash val="solid"/>
                       <a:round/>
@@ -1846,7 +1768,7 @@
                     </a:lnT>
                     <a:lnB w="6350" cap="flat" cmpd="sng" algn="ctr">
                       <a:solidFill>
-                        <a:srgbClr val="B5B5B5"/>
+                        <a:srgbClr val="C6C9CD"/>
                       </a:solidFill>
                       <a:prstDash val="solid"/>
                       <a:round/>
@@ -1859,7 +1781,7 @@
                   </a:tcPr>
                 </a:tc>
               </a:tr>
-              <a:tr h="615950">
+              <a:tr h="438150">
                 <a:tc>
                   <a:txBody>
                     <a:bodyPr>
@@ -1871,7 +1793,7 @@
                         <a:buNone/>
                       </a:pPr>
                       <a:r>
-                        <a:rPr lang="en-US" sz="1200" b="1" dirty="0">
+                        <a:rPr lang="en-US" sz="1100" b="1" dirty="0">
                           <a:solidFill>
                             <a:srgbClr val="000000"/>
                           </a:solidFill>
@@ -1881,17 +1803,17 @@
                         </a:rPr>
                         <a:t>Critical data exceptions</a:t>
                       </a:r>
-                      <a:endParaRPr lang="en-US" sz="1200" dirty="0">
+                      <a:endParaRPr lang="en-US" sz="1100" dirty="0">
                         <a:latin typeface="Arial" charset="0"/>
                         <a:ea typeface="Arial" charset="0"/>
                         <a:cs typeface="Arial" charset="0"/>
                       </a:endParaRPr>
                     </a:p>
                   </a:txBody>
-                  <a:tcPr marL="127000" marR="127000" marT="127000" marB="127000" anchor="ctr">
+                  <a:tcPr marL="101600" marR="101600" marT="38100" marB="38100" anchor="ctr">
                     <a:lnL w="6350" cap="flat" cmpd="sng" algn="ctr">
                       <a:solidFill>
-                        <a:srgbClr val="B5B5B5"/>
+                        <a:srgbClr val="C6C9CD"/>
                       </a:solidFill>
                       <a:prstDash val="solid"/>
                       <a:round/>
@@ -1900,7 +1822,7 @@
                     </a:lnL>
                     <a:lnR w="6350" cap="flat" cmpd="sng" algn="ctr">
                       <a:solidFill>
-                        <a:srgbClr val="B5B5B5"/>
+                        <a:srgbClr val="C6C9CD"/>
                       </a:solidFill>
                       <a:prstDash val="solid"/>
                       <a:round/>
@@ -1909,7 +1831,7 @@
                     </a:lnR>
                     <a:lnT w="6350" cap="flat" cmpd="sng" algn="ctr">
                       <a:solidFill>
-                        <a:srgbClr val="B5B5B5"/>
+                        <a:srgbClr val="C6C9CD"/>
                       </a:solidFill>
                       <a:prstDash val="solid"/>
                       <a:round/>
@@ -1918,7 +1840,7 @@
                     </a:lnT>
                     <a:lnB w="6350" cap="flat" cmpd="sng" algn="ctr">
                       <a:solidFill>
-                        <a:srgbClr val="B5B5B5"/>
+                        <a:srgbClr val="C6C9CD"/>
                       </a:solidFill>
                       <a:prstDash val="solid"/>
                       <a:round/>
@@ -1937,11 +1859,11 @@
                     </a:bodyPr>
                     <a:lstStyle/>
                     <a:p>
-                      <a:pPr algn="l" indent="0" marL="0">
+                      <a:pPr algn="ctr" indent="0" marL="0">
                         <a:buNone/>
                       </a:pPr>
                       <a:r>
-                        <a:rPr lang="en-US" sz="1200" dirty="0">
+                        <a:rPr lang="en-US" sz="1100" dirty="0">
                           <a:solidFill>
                             <a:srgbClr val="000000"/>
                           </a:solidFill>
@@ -1951,17 +1873,17 @@
                         </a:rPr>
                         <a:t>0</a:t>
                       </a:r>
-                      <a:endParaRPr lang="en-US" sz="1200" dirty="0">
+                      <a:endParaRPr lang="en-US" sz="1100" dirty="0">
                         <a:latin typeface="Arial" charset="0"/>
                         <a:ea typeface="Arial" charset="0"/>
                         <a:cs typeface="Arial" charset="0"/>
                       </a:endParaRPr>
                     </a:p>
                   </a:txBody>
-                  <a:tcPr marL="127000" marR="127000" marT="127000" marB="127000" anchor="ctr">
+                  <a:tcPr marL="101600" marR="101600" marT="38100" marB="38100" anchor="ctr">
                     <a:lnL w="6350" cap="flat" cmpd="sng" algn="ctr">
                       <a:solidFill>
-                        <a:srgbClr val="B5B5B5"/>
+                        <a:srgbClr val="C6C9CD"/>
                       </a:solidFill>
                       <a:prstDash val="solid"/>
                       <a:round/>
@@ -1970,7 +1892,7 @@
                     </a:lnL>
                     <a:lnR w="6350" cap="flat" cmpd="sng" algn="ctr">
                       <a:solidFill>
-                        <a:srgbClr val="B5B5B5"/>
+                        <a:srgbClr val="C6C9CD"/>
                       </a:solidFill>
                       <a:prstDash val="solid"/>
                       <a:round/>
@@ -1979,7 +1901,7 @@
                     </a:lnR>
                     <a:lnT w="6350" cap="flat" cmpd="sng" algn="ctr">
                       <a:solidFill>
-                        <a:srgbClr val="B5B5B5"/>
+                        <a:srgbClr val="C6C9CD"/>
                       </a:solidFill>
                       <a:prstDash val="solid"/>
                       <a:round/>
@@ -1988,7 +1910,7 @@
                     </a:lnT>
                     <a:lnB w="6350" cap="flat" cmpd="sng" algn="ctr">
                       <a:solidFill>
-                        <a:srgbClr val="B5B5B5"/>
+                        <a:srgbClr val="C6C9CD"/>
                       </a:solidFill>
                       <a:prstDash val="solid"/>
                       <a:round/>
@@ -2001,7 +1923,7 @@
                   </a:tcPr>
                 </a:tc>
               </a:tr>
-              <a:tr h="628650">
+              <a:tr h="450850">
                 <a:tc>
                   <a:txBody>
                     <a:bodyPr>
@@ -2013,7 +1935,7 @@
                         <a:buNone/>
                       </a:pPr>
                       <a:r>
-                        <a:rPr lang="en-US" sz="1200" b="1" dirty="0">
+                        <a:rPr lang="en-US" sz="1100" b="1" dirty="0">
                           <a:solidFill>
                             <a:srgbClr val="000000"/>
                           </a:solidFill>
@@ -2023,17 +1945,17 @@
                         </a:rPr>
                         <a:t>Weekly-active pilot users</a:t>
                       </a:r>
-                      <a:endParaRPr lang="en-US" sz="1200" dirty="0">
+                      <a:endParaRPr lang="en-US" sz="1100" dirty="0">
                         <a:latin typeface="Arial" charset="0"/>
                         <a:ea typeface="Arial" charset="0"/>
                         <a:cs typeface="Arial" charset="0"/>
                       </a:endParaRPr>
                     </a:p>
                   </a:txBody>
-                  <a:tcPr marL="127000" marR="127000" marT="127000" marB="127000" anchor="ctr">
+                  <a:tcPr marL="101600" marR="101600" marT="38100" marB="38100" anchor="ctr">
                     <a:lnL w="6350" cap="flat" cmpd="sng" algn="ctr">
                       <a:solidFill>
-                        <a:srgbClr val="B5B5B5"/>
+                        <a:srgbClr val="C6C9CD"/>
                       </a:solidFill>
                       <a:prstDash val="solid"/>
                       <a:round/>
@@ -2042,7 +1964,7 @@
                     </a:lnL>
                     <a:lnR w="6350" cap="flat" cmpd="sng" algn="ctr">
                       <a:solidFill>
-                        <a:srgbClr val="B5B5B5"/>
+                        <a:srgbClr val="C6C9CD"/>
                       </a:solidFill>
                       <a:prstDash val="solid"/>
                       <a:round/>
@@ -2051,7 +1973,7 @@
                     </a:lnR>
                     <a:lnT w="6350" cap="flat" cmpd="sng" algn="ctr">
                       <a:solidFill>
-                        <a:srgbClr val="B5B5B5"/>
+                        <a:srgbClr val="C6C9CD"/>
                       </a:solidFill>
                       <a:prstDash val="solid"/>
                       <a:round/>
@@ -2060,7 +1982,7 @@
                     </a:lnT>
                     <a:lnB w="6350" cap="flat" cmpd="sng" algn="ctr">
                       <a:solidFill>
-                        <a:srgbClr val="B5B5B5"/>
+                        <a:srgbClr val="C6C9CD"/>
                       </a:solidFill>
                       <a:prstDash val="solid"/>
                       <a:round/>
@@ -2079,11 +2001,11 @@
                     </a:bodyPr>
                     <a:lstStyle/>
                     <a:p>
-                      <a:pPr algn="l" indent="0" marL="0">
+                      <a:pPr algn="ctr" indent="0" marL="0">
                         <a:buNone/>
                       </a:pPr>
                       <a:r>
-                        <a:rPr lang="en-US" sz="1200" dirty="0">
+                        <a:rPr lang="en-US" sz="1100" dirty="0">
                           <a:solidFill>
                             <a:srgbClr val="000000"/>
                           </a:solidFill>
@@ -2093,17 +2015,17 @@
                         </a:rPr>
                         <a:t>70% · at least 11 of 15</a:t>
                       </a:r>
-                      <a:endParaRPr lang="en-US" sz="1200" dirty="0">
+                      <a:endParaRPr lang="en-US" sz="1100" dirty="0">
                         <a:latin typeface="Arial" charset="0"/>
                         <a:ea typeface="Arial" charset="0"/>
                         <a:cs typeface="Arial" charset="0"/>
                       </a:endParaRPr>
                     </a:p>
                   </a:txBody>
-                  <a:tcPr marL="127000" marR="127000" marT="127000" marB="127000" anchor="ctr">
+                  <a:tcPr marL="101600" marR="101600" marT="38100" marB="38100" anchor="ctr">
                     <a:lnL w="6350" cap="flat" cmpd="sng" algn="ctr">
                       <a:solidFill>
-                        <a:srgbClr val="B5B5B5"/>
+                        <a:srgbClr val="C6C9CD"/>
                       </a:solidFill>
                       <a:prstDash val="solid"/>
                       <a:round/>
@@ -2112,7 +2034,7 @@
                     </a:lnL>
                     <a:lnR w="6350" cap="flat" cmpd="sng" algn="ctr">
                       <a:solidFill>
-                        <a:srgbClr val="B5B5B5"/>
+                        <a:srgbClr val="C6C9CD"/>
                       </a:solidFill>
                       <a:prstDash val="solid"/>
                       <a:round/>
@@ -2121,7 +2043,7 @@
                     </a:lnR>
                     <a:lnT w="6350" cap="flat" cmpd="sng" algn="ctr">
                       <a:solidFill>
-                        <a:srgbClr val="B5B5B5"/>
+                        <a:srgbClr val="C6C9CD"/>
                       </a:solidFill>
                       <a:prstDash val="solid"/>
                       <a:round/>
@@ -2130,7 +2052,7 @@
                     </a:lnT>
                     <a:lnB w="6350" cap="flat" cmpd="sng" algn="ctr">
                       <a:solidFill>
-                        <a:srgbClr val="B5B5B5"/>
+                        <a:srgbClr val="C6C9CD"/>
                       </a:solidFill>
                       <a:prstDash val="solid"/>
                       <a:round/>
@@ -2149,14 +2071,14 @@
       </p:graphicFrame>
       <p:sp>
         <p:nvSpPr>
-          <p:cNvPr id="10" name="headline"/>
+          <p:cNvPr id="7" name="headline"/>
           <p:cNvSpPr txBox="1"/>
           <p:nvPr/>
         </p:nvSpPr>
         <p:spPr>
           <a:xfrm>
-            <a:off x="304800" y="527050"/>
-            <a:ext cx="11582400" cy="508000"/>
+            <a:off x="292100" y="533400"/>
+            <a:ext cx="11607800" cy="482600"/>
           </a:xfrm>
           <a:prstGeom prst="rect">
             <a:avLst/>
@@ -2194,14 +2116,14 @@
       </p:sp>
       <p:sp>
         <p:nvSpPr>
-          <p:cNvPr id="11" name="pilot-scope"/>
+          <p:cNvPr id="8" name="subtitle"/>
           <p:cNvSpPr txBox="1"/>
           <p:nvPr/>
         </p:nvSpPr>
         <p:spPr>
           <a:xfrm>
-            <a:off x="304800" y="1060450"/>
-            <a:ext cx="11582400" cy="304800"/>
+            <a:off x="298450" y="1047750"/>
+            <a:ext cx="11588750" cy="304800"/>
           </a:xfrm>
           <a:prstGeom prst="rect">
             <a:avLst/>
@@ -2239,14 +2161,14 @@
       </p:sp>
       <p:sp>
         <p:nvSpPr>
-          <p:cNvPr id="12" name="capacity-heading"/>
+          <p:cNvPr id="9" name="baseline"/>
           <p:cNvSpPr txBox="1"/>
           <p:nvPr/>
         </p:nvSpPr>
         <p:spPr>
           <a:xfrm>
-            <a:off x="298450" y="1860550"/>
-            <a:ext cx="4095750" cy="273050"/>
+            <a:off x="298450" y="1524000"/>
+            <a:ext cx="3175000" cy="444500"/>
           </a:xfrm>
           <a:prstGeom prst="rect">
             <a:avLst/>
@@ -2268,30 +2190,30 @@
               <a:defRPr spc="0"/>
             </a:pPr>
             <a:r>
-              <a:rPr lang="en-US" sz="1400" b="1" dirty="0" spc="0">
+              <a:rPr lang="en-US" sz="2900" b="1" dirty="0" spc="0">
                 <a:solidFill>
-                  <a:srgbClr val="000000"/>
+                  <a:srgbClr val="FD5108"/>
                 </a:solidFill>
                 <a:latin typeface="Arial" pitchFamily="34" charset="0"/>
                 <a:ea typeface="Arial" pitchFamily="34" charset="-122"/>
                 <a:cs typeface="Arial" pitchFamily="34" charset="-120"/>
               </a:rPr>
-              <a:t>RESEARCH CAPACITY IMPACT IF WE SCALE</a:t>
+              <a:t>10,800 h</a:t>
             </a:r>
-            <a:endParaRPr lang="en-US" sz="1400" dirty="0" spc="0"/>
-          </a:p>
-        </p:txBody>
-      </p:sp>
-      <p:sp>
-        <p:nvSpPr>
-          <p:cNvPr id="13" name="argument-heading"/>
+            <a:endParaRPr lang="en-US" sz="2900" dirty="0" spc="0"/>
+          </a:p>
+        </p:txBody>
+      </p:sp>
+      <p:sp>
+        <p:nvSpPr>
+          <p:cNvPr id="10" name="baseline-label"/>
           <p:cNvSpPr txBox="1"/>
           <p:nvPr/>
         </p:nvSpPr>
         <p:spPr>
           <a:xfrm>
-            <a:off x="4445000" y="1860550"/>
-            <a:ext cx="3162300" cy="273050"/>
+            <a:off x="298450" y="1981200"/>
+            <a:ext cx="3302000" cy="203200"/>
           </a:xfrm>
           <a:prstGeom prst="rect">
             <a:avLst/>
@@ -2313,7 +2235,367 @@
               <a:defRPr spc="0"/>
             </a:pPr>
             <a:r>
-              <a:rPr lang="en-US" sz="1400" b="1" dirty="0" spc="0">
+              <a:rPr lang="en-US" sz="1250" b="1" dirty="0" spc="0">
+                <a:solidFill>
+                  <a:srgbClr val="000000"/>
+                </a:solidFill>
+                <a:latin typeface="Arial" pitchFamily="34" charset="0"/>
+                <a:ea typeface="Arial" pitchFamily="34" charset="-122"/>
+                <a:cs typeface="Arial" pitchFamily="34" charset="-120"/>
+              </a:rPr>
+              <a:t>Annual research baseline</a:t>
+            </a:r>
+            <a:endParaRPr lang="en-US" sz="1250" dirty="0" spc="0"/>
+          </a:p>
+        </p:txBody>
+      </p:sp>
+      <p:sp>
+        <p:nvSpPr>
+          <p:cNvPr id="11" name="baseline-formula"/>
+          <p:cNvSpPr txBox="1"/>
+          <p:nvPr/>
+        </p:nvSpPr>
+        <p:spPr>
+          <a:xfrm>
+            <a:off x="298450" y="2197100"/>
+            <a:ext cx="3302000" cy="203200"/>
+          </a:xfrm>
+          <a:prstGeom prst="rect">
+            <a:avLst/>
+          </a:prstGeom>
+          <a:noFill/>
+          <a:ln/>
+        </p:spPr>
+        <p:txBody>
+          <a:bodyPr wrap="square" lIns="12700" tIns="12700" rIns="12700" bIns="12700" rtlCol="0" anchor="t">
+            <a:noAutofit/>
+          </a:bodyPr>
+          <a:lstStyle/>
+          <a:p>
+            <a:pPr algn="l" indent="0" marL="0">
+              <a:lnSpc>
+                <a:spcPct val="100000"/>
+              </a:lnSpc>
+              <a:buNone/>
+              <a:defRPr spc="0"/>
+            </a:pPr>
+            <a:r>
+              <a:rPr lang="en-US" sz="1150" dirty="0" spc="0">
+                <a:solidFill>
+                  <a:srgbClr val="000000"/>
+                </a:solidFill>
+                <a:latin typeface="Arial" pitchFamily="34" charset="0"/>
+                <a:ea typeface="Arial" pitchFamily="34" charset="-122"/>
+                <a:cs typeface="Arial" pitchFamily="34" charset="-120"/>
+              </a:rPr>
+              <a:t>900 engagements × 12 h</a:t>
+            </a:r>
+            <a:endParaRPr lang="en-US" sz="1150" dirty="0" spc="0"/>
+          </a:p>
+        </p:txBody>
+      </p:sp>
+      <p:sp>
+        <p:nvSpPr>
+          <p:cNvPr id="12" name="capacity"/>
+          <p:cNvSpPr txBox="1"/>
+          <p:nvPr/>
+        </p:nvSpPr>
+        <p:spPr>
+          <a:xfrm>
+            <a:off x="4406900" y="1524000"/>
+            <a:ext cx="3175000" cy="444500"/>
+          </a:xfrm>
+          <a:prstGeom prst="rect">
+            <a:avLst/>
+          </a:prstGeom>
+          <a:noFill/>
+          <a:ln/>
+        </p:spPr>
+        <p:txBody>
+          <a:bodyPr wrap="square" lIns="12700" tIns="12700" rIns="12700" bIns="12700" rtlCol="0" anchor="t">
+            <a:noAutofit/>
+          </a:bodyPr>
+          <a:lstStyle/>
+          <a:p>
+            <a:pPr algn="l" indent="0" marL="0">
+              <a:lnSpc>
+                <a:spcPct val="100000"/>
+              </a:lnSpc>
+              <a:buNone/>
+              <a:defRPr spc="0"/>
+            </a:pPr>
+            <a:r>
+              <a:rPr lang="en-US" sz="2900" b="1" dirty="0" spc="0">
+                <a:solidFill>
+                  <a:srgbClr val="FD5108"/>
+                </a:solidFill>
+                <a:latin typeface="Arial" pitchFamily="34" charset="0"/>
+                <a:ea typeface="Arial" pitchFamily="34" charset="-122"/>
+                <a:cs typeface="Arial" pitchFamily="34" charset="-120"/>
+              </a:rPr>
+              <a:t>1,944 h</a:t>
+            </a:r>
+            <a:endParaRPr lang="en-US" sz="2900" dirty="0" spc="0"/>
+          </a:p>
+        </p:txBody>
+      </p:sp>
+      <p:sp>
+        <p:nvSpPr>
+          <p:cNvPr id="13" name="capacity-label"/>
+          <p:cNvSpPr txBox="1"/>
+          <p:nvPr/>
+        </p:nvSpPr>
+        <p:spPr>
+          <a:xfrm>
+            <a:off x="4406900" y="1981200"/>
+            <a:ext cx="3302000" cy="203200"/>
+          </a:xfrm>
+          <a:prstGeom prst="rect">
+            <a:avLst/>
+          </a:prstGeom>
+          <a:noFill/>
+          <a:ln/>
+        </p:spPr>
+        <p:txBody>
+          <a:bodyPr wrap="square" lIns="12700" tIns="12700" rIns="12700" bIns="12700" rtlCol="0" anchor="t">
+            <a:noAutofit/>
+          </a:bodyPr>
+          <a:lstStyle/>
+          <a:p>
+            <a:pPr algn="l" indent="0" marL="0">
+              <a:lnSpc>
+                <a:spcPct val="100000"/>
+              </a:lnSpc>
+              <a:buNone/>
+              <a:defRPr spc="0"/>
+            </a:pPr>
+            <a:r>
+              <a:rPr lang="en-US" sz="1250" b="1" dirty="0" spc="0">
+                <a:solidFill>
+                  <a:srgbClr val="000000"/>
+                </a:solidFill>
+                <a:latin typeface="Arial" pitchFamily="34" charset="0"/>
+                <a:ea typeface="Arial" pitchFamily="34" charset="-122"/>
+                <a:cs typeface="Arial" pitchFamily="34" charset="-120"/>
+              </a:rPr>
+              <a:t>Potential annual capacity</a:t>
+            </a:r>
+            <a:endParaRPr lang="en-US" sz="1250" dirty="0" spc="0"/>
+          </a:p>
+        </p:txBody>
+      </p:sp>
+      <p:sp>
+        <p:nvSpPr>
+          <p:cNvPr id="14" name="capacity-formula"/>
+          <p:cNvSpPr txBox="1"/>
+          <p:nvPr/>
+        </p:nvSpPr>
+        <p:spPr>
+          <a:xfrm>
+            <a:off x="4406900" y="2197100"/>
+            <a:ext cx="3302000" cy="203200"/>
+          </a:xfrm>
+          <a:prstGeom prst="rect">
+            <a:avLst/>
+          </a:prstGeom>
+          <a:noFill/>
+          <a:ln/>
+        </p:spPr>
+        <p:txBody>
+          <a:bodyPr wrap="square" lIns="12700" tIns="12700" rIns="12700" bIns="12700" rtlCol="0" anchor="t">
+            <a:noAutofit/>
+          </a:bodyPr>
+          <a:lstStyle/>
+          <a:p>
+            <a:pPr algn="l" indent="0" marL="0">
+              <a:lnSpc>
+                <a:spcPct val="100000"/>
+              </a:lnSpc>
+              <a:buNone/>
+              <a:defRPr spc="0"/>
+            </a:pPr>
+            <a:r>
+              <a:rPr lang="en-US" sz="1150" dirty="0" spc="0">
+                <a:solidFill>
+                  <a:srgbClr val="000000"/>
+                </a:solidFill>
+                <a:latin typeface="Arial" pitchFamily="34" charset="0"/>
+                <a:ea typeface="Arial" pitchFamily="34" charset="-122"/>
+                <a:cs typeface="Arial" pitchFamily="34" charset="-120"/>
+              </a:rPr>
+              <a:t>60% adoption × 30% time reduction</a:t>
+            </a:r>
+            <a:endParaRPr lang="en-US" sz="1150" dirty="0" spc="0"/>
+          </a:p>
+        </p:txBody>
+      </p:sp>
+      <p:sp>
+        <p:nvSpPr>
+          <p:cNvPr id="15" name="value"/>
+          <p:cNvSpPr txBox="1"/>
+          <p:nvPr/>
+        </p:nvSpPr>
+        <p:spPr>
+          <a:xfrm>
+            <a:off x="8509000" y="1524000"/>
+            <a:ext cx="3175000" cy="444500"/>
+          </a:xfrm>
+          <a:prstGeom prst="rect">
+            <a:avLst/>
+          </a:prstGeom>
+          <a:noFill/>
+          <a:ln/>
+        </p:spPr>
+        <p:txBody>
+          <a:bodyPr wrap="square" lIns="12700" tIns="12700" rIns="12700" bIns="12700" rtlCol="0" anchor="t">
+            <a:noAutofit/>
+          </a:bodyPr>
+          <a:lstStyle/>
+          <a:p>
+            <a:pPr algn="l" indent="0" marL="0">
+              <a:lnSpc>
+                <a:spcPct val="100000"/>
+              </a:lnSpc>
+              <a:buNone/>
+              <a:defRPr spc="0"/>
+            </a:pPr>
+            <a:r>
+              <a:rPr lang="en-US" sz="2900" b="1" dirty="0" spc="0">
+                <a:solidFill>
+                  <a:srgbClr val="FD5108"/>
+                </a:solidFill>
+                <a:latin typeface="Arial" pitchFamily="34" charset="0"/>
+                <a:ea typeface="Arial" pitchFamily="34" charset="-122"/>
+                <a:cs typeface="Arial" pitchFamily="34" charset="-120"/>
+              </a:rPr>
+              <a:t>$243k</a:t>
+            </a:r>
+            <a:endParaRPr lang="en-US" sz="2900" dirty="0" spc="0"/>
+          </a:p>
+        </p:txBody>
+      </p:sp>
+      <p:sp>
+        <p:nvSpPr>
+          <p:cNvPr id="16" name="value-label"/>
+          <p:cNvSpPr txBox="1"/>
+          <p:nvPr/>
+        </p:nvSpPr>
+        <p:spPr>
+          <a:xfrm>
+            <a:off x="8509000" y="1981200"/>
+            <a:ext cx="3302000" cy="203200"/>
+          </a:xfrm>
+          <a:prstGeom prst="rect">
+            <a:avLst/>
+          </a:prstGeom>
+          <a:noFill/>
+          <a:ln/>
+        </p:spPr>
+        <p:txBody>
+          <a:bodyPr wrap="square" lIns="12700" tIns="12700" rIns="12700" bIns="12700" rtlCol="0" anchor="t">
+            <a:noAutofit/>
+          </a:bodyPr>
+          <a:lstStyle/>
+          <a:p>
+            <a:pPr algn="l" indent="0" marL="0">
+              <a:lnSpc>
+                <a:spcPct val="100000"/>
+              </a:lnSpc>
+              <a:buNone/>
+              <a:defRPr spc="0"/>
+            </a:pPr>
+            <a:r>
+              <a:rPr lang="en-US" sz="1250" b="1" dirty="0" spc="0">
+                <a:solidFill>
+                  <a:srgbClr val="000000"/>
+                </a:solidFill>
+                <a:latin typeface="Arial" pitchFamily="34" charset="0"/>
+                <a:ea typeface="Arial" pitchFamily="34" charset="-122"/>
+                <a:cs typeface="Arial" pitchFamily="34" charset="-120"/>
+              </a:rPr>
+              <a:t>Annual capacity equivalent</a:t>
+            </a:r>
+            <a:endParaRPr lang="en-US" sz="1250" dirty="0" spc="0"/>
+          </a:p>
+        </p:txBody>
+      </p:sp>
+      <p:sp>
+        <p:nvSpPr>
+          <p:cNvPr id="17" name="value-formula"/>
+          <p:cNvSpPr txBox="1"/>
+          <p:nvPr/>
+        </p:nvSpPr>
+        <p:spPr>
+          <a:xfrm>
+            <a:off x="8509000" y="2197100"/>
+            <a:ext cx="3302000" cy="203200"/>
+          </a:xfrm>
+          <a:prstGeom prst="rect">
+            <a:avLst/>
+          </a:prstGeom>
+          <a:noFill/>
+          <a:ln/>
+        </p:spPr>
+        <p:txBody>
+          <a:bodyPr wrap="square" lIns="12700" tIns="12700" rIns="12700" bIns="12700" rtlCol="0" anchor="t">
+            <a:noAutofit/>
+          </a:bodyPr>
+          <a:lstStyle/>
+          <a:p>
+            <a:pPr algn="l" indent="0" marL="0">
+              <a:lnSpc>
+                <a:spcPct val="100000"/>
+              </a:lnSpc>
+              <a:buNone/>
+              <a:defRPr spc="0"/>
+            </a:pPr>
+            <a:r>
+              <a:rPr lang="en-US" sz="1150" dirty="0" spc="0">
+                <a:solidFill>
+                  <a:srgbClr val="000000"/>
+                </a:solidFill>
+                <a:latin typeface="Arial" pitchFamily="34" charset="0"/>
+                <a:ea typeface="Arial" pitchFamily="34" charset="-122"/>
+                <a:cs typeface="Arial" pitchFamily="34" charset="-120"/>
+              </a:rPr>
+              <a:t>1,944 h × $125 per hour</a:t>
+            </a:r>
+            <a:endParaRPr lang="en-US" sz="1150" dirty="0" spc="0"/>
+          </a:p>
+        </p:txBody>
+      </p:sp>
+      <p:sp>
+        <p:nvSpPr>
+          <p:cNvPr id="18" name="argument-heading"/>
+          <p:cNvSpPr txBox="1"/>
+          <p:nvPr/>
+        </p:nvSpPr>
+        <p:spPr>
+          <a:xfrm>
+            <a:off x="298450" y="2667000"/>
+            <a:ext cx="5397500" cy="266700"/>
+          </a:xfrm>
+          <a:prstGeom prst="rect">
+            <a:avLst/>
+          </a:prstGeom>
+          <a:noFill/>
+          <a:ln/>
+        </p:spPr>
+        <p:txBody>
+          <a:bodyPr wrap="square" lIns="12700" tIns="12700" rIns="12700" bIns="12700" rtlCol="0" anchor="t">
+            <a:noAutofit/>
+          </a:bodyPr>
+          <a:lstStyle/>
+          <a:p>
+            <a:pPr algn="l" indent="0" marL="0">
+              <a:lnSpc>
+                <a:spcPct val="100000"/>
+              </a:lnSpc>
+              <a:buNone/>
+              <a:defRPr spc="0"/>
+            </a:pPr>
+            <a:r>
+              <a:rPr lang="en-US" sz="1350" b="1" dirty="0" spc="0">
                 <a:solidFill>
                   <a:srgbClr val="000000"/>
                 </a:solidFill>
@@ -2323,20 +2605,20 @@
               </a:rPr>
               <a:t>WHY THIS PILOT FIRST</a:t>
             </a:r>
-            <a:endParaRPr lang="en-US" sz="1400" dirty="0" spc="0"/>
-          </a:p>
-        </p:txBody>
-      </p:sp>
-      <p:sp>
-        <p:nvSpPr>
-          <p:cNvPr id="14" name="gate-heading"/>
+            <a:endParaRPr lang="en-US" sz="1350" dirty="0" spc="0"/>
+          </a:p>
+        </p:txBody>
+      </p:sp>
+      <p:sp>
+        <p:nvSpPr>
+          <p:cNvPr id="19" name="reason-number-01"/>
           <p:cNvSpPr txBox="1"/>
           <p:nvPr/>
         </p:nvSpPr>
         <p:spPr>
           <a:xfrm>
-            <a:off x="7766050" y="1860550"/>
-            <a:ext cx="4121150" cy="273050"/>
+            <a:off x="1047750" y="3092450"/>
+            <a:ext cx="393700" cy="279400"/>
           </a:xfrm>
           <a:prstGeom prst="rect">
             <a:avLst/>
@@ -2358,7 +2640,412 @@
               <a:defRPr spc="0"/>
             </a:pPr>
             <a:r>
-              <a:rPr lang="en-US" sz="1400" b="1" dirty="0" spc="0">
+              <a:rPr lang="en-US" sz="1250" b="1" dirty="0" spc="0">
+                <a:solidFill>
+                  <a:srgbClr val="000000"/>
+                </a:solidFill>
+                <a:latin typeface="Arial" pitchFamily="34" charset="0"/>
+                <a:ea typeface="Arial" pitchFamily="34" charset="-122"/>
+                <a:cs typeface="Arial" pitchFamily="34" charset="-120"/>
+              </a:rPr>
+              <a:t>01</a:t>
+            </a:r>
+            <a:endParaRPr lang="en-US" sz="1250" dirty="0" spc="0"/>
+          </a:p>
+        </p:txBody>
+      </p:sp>
+      <p:sp>
+        <p:nvSpPr>
+          <p:cNvPr id="20" name="reason-title-01"/>
+          <p:cNvSpPr txBox="1"/>
+          <p:nvPr/>
+        </p:nvSpPr>
+        <p:spPr>
+          <a:xfrm>
+            <a:off x="1619250" y="3073400"/>
+            <a:ext cx="3429000" cy="222250"/>
+          </a:xfrm>
+          <a:prstGeom prst="rect">
+            <a:avLst/>
+          </a:prstGeom>
+          <a:noFill/>
+          <a:ln/>
+        </p:spPr>
+        <p:txBody>
+          <a:bodyPr wrap="square" lIns="12700" tIns="12700" rIns="12700" bIns="12700" rtlCol="0" anchor="t">
+            <a:noAutofit/>
+          </a:bodyPr>
+          <a:lstStyle/>
+          <a:p>
+            <a:pPr algn="l" indent="0" marL="0">
+              <a:lnSpc>
+                <a:spcPct val="100000"/>
+              </a:lnSpc>
+              <a:buNone/>
+              <a:defRPr spc="0"/>
+            </a:pPr>
+            <a:r>
+              <a:rPr lang="en-US" sz="1250" b="1" dirty="0" spc="0">
+                <a:solidFill>
+                  <a:srgbClr val="000000"/>
+                </a:solidFill>
+                <a:latin typeface="Arial" pitchFamily="34" charset="0"/>
+                <a:ea typeface="Arial" pitchFamily="34" charset="-122"/>
+                <a:cs typeface="Arial" pitchFamily="34" charset="-120"/>
+              </a:rPr>
+              <a:t>Focus a repeatable task</a:t>
+            </a:r>
+            <a:endParaRPr lang="en-US" sz="1250" dirty="0" spc="0"/>
+          </a:p>
+        </p:txBody>
+      </p:sp>
+      <p:sp>
+        <p:nvSpPr>
+          <p:cNvPr id="21" name="reason-detail-01"/>
+          <p:cNvSpPr txBox="1"/>
+          <p:nvPr/>
+        </p:nvSpPr>
+        <p:spPr>
+          <a:xfrm>
+            <a:off x="1619250" y="3314700"/>
+            <a:ext cx="4445000" cy="254000"/>
+          </a:xfrm>
+          <a:prstGeom prst="rect">
+            <a:avLst/>
+          </a:prstGeom>
+          <a:noFill/>
+          <a:ln/>
+        </p:spPr>
+        <p:txBody>
+          <a:bodyPr wrap="square" lIns="12700" tIns="12700" rIns="12700" bIns="12700" rtlCol="0" anchor="t">
+            <a:noAutofit/>
+          </a:bodyPr>
+          <a:lstStyle/>
+          <a:p>
+            <a:pPr algn="l" indent="0" marL="0">
+              <a:lnSpc>
+                <a:spcPct val="100000"/>
+              </a:lnSpc>
+              <a:buNone/>
+              <a:defRPr spc="0"/>
+            </a:pPr>
+            <a:r>
+              <a:rPr lang="en-US" sz="1050" dirty="0" spc="0">
+                <a:solidFill>
+                  <a:srgbClr val="000000"/>
+                </a:solidFill>
+                <a:latin typeface="Arial" pitchFamily="34" charset="0"/>
+                <a:ea typeface="Arial" pitchFamily="34" charset="-122"/>
+                <a:cs typeface="Arial" pitchFamily="34" charset="-120"/>
+              </a:rPr>
+              <a:t>Approved sources, frequent use and comparable inputs.</a:t>
+            </a:r>
+            <a:endParaRPr lang="en-US" sz="1050" dirty="0" spc="0"/>
+          </a:p>
+        </p:txBody>
+      </p:sp>
+      <p:sp>
+        <p:nvSpPr>
+          <p:cNvPr id="22" name="reason-number-02"/>
+          <p:cNvSpPr txBox="1"/>
+          <p:nvPr/>
+        </p:nvSpPr>
+        <p:spPr>
+          <a:xfrm>
+            <a:off x="1047750" y="3771900"/>
+            <a:ext cx="393700" cy="279400"/>
+          </a:xfrm>
+          <a:prstGeom prst="rect">
+            <a:avLst/>
+          </a:prstGeom>
+          <a:noFill/>
+          <a:ln/>
+        </p:spPr>
+        <p:txBody>
+          <a:bodyPr wrap="square" lIns="12700" tIns="12700" rIns="12700" bIns="12700" rtlCol="0" anchor="t">
+            <a:noAutofit/>
+          </a:bodyPr>
+          <a:lstStyle/>
+          <a:p>
+            <a:pPr algn="l" indent="0" marL="0">
+              <a:lnSpc>
+                <a:spcPct val="100000"/>
+              </a:lnSpc>
+              <a:buNone/>
+              <a:defRPr spc="0"/>
+            </a:pPr>
+            <a:r>
+              <a:rPr lang="en-US" sz="1250" b="1" dirty="0" spc="0">
+                <a:solidFill>
+                  <a:srgbClr val="000000"/>
+                </a:solidFill>
+                <a:latin typeface="Arial" pitchFamily="34" charset="0"/>
+                <a:ea typeface="Arial" pitchFamily="34" charset="-122"/>
+                <a:cs typeface="Arial" pitchFamily="34" charset="-120"/>
+              </a:rPr>
+              <a:t>02</a:t>
+            </a:r>
+            <a:endParaRPr lang="en-US" sz="1250" dirty="0" spc="0"/>
+          </a:p>
+        </p:txBody>
+      </p:sp>
+      <p:sp>
+        <p:nvSpPr>
+          <p:cNvPr id="23" name="reason-title-02"/>
+          <p:cNvSpPr txBox="1"/>
+          <p:nvPr/>
+        </p:nvSpPr>
+        <p:spPr>
+          <a:xfrm>
+            <a:off x="1619250" y="3752850"/>
+            <a:ext cx="3429000" cy="222250"/>
+          </a:xfrm>
+          <a:prstGeom prst="rect">
+            <a:avLst/>
+          </a:prstGeom>
+          <a:noFill/>
+          <a:ln/>
+        </p:spPr>
+        <p:txBody>
+          <a:bodyPr wrap="square" lIns="12700" tIns="12700" rIns="12700" bIns="12700" rtlCol="0" anchor="t">
+            <a:noAutofit/>
+          </a:bodyPr>
+          <a:lstStyle/>
+          <a:p>
+            <a:pPr algn="l" indent="0" marL="0">
+              <a:lnSpc>
+                <a:spcPct val="100000"/>
+              </a:lnSpc>
+              <a:buNone/>
+              <a:defRPr spc="0"/>
+            </a:pPr>
+            <a:r>
+              <a:rPr lang="en-US" sz="1250" b="1" dirty="0" spc="0">
+                <a:solidFill>
+                  <a:srgbClr val="000000"/>
+                </a:solidFill>
+                <a:latin typeface="Arial" pitchFamily="34" charset="0"/>
+                <a:ea typeface="Arial" pitchFamily="34" charset="-122"/>
+                <a:cs typeface="Arial" pitchFamily="34" charset="-120"/>
+              </a:rPr>
+              <a:t>Preserve expert review</a:t>
+            </a:r>
+            <a:endParaRPr lang="en-US" sz="1250" dirty="0" spc="0"/>
+          </a:p>
+        </p:txBody>
+      </p:sp>
+      <p:sp>
+        <p:nvSpPr>
+          <p:cNvPr id="24" name="reason-detail-02"/>
+          <p:cNvSpPr txBox="1"/>
+          <p:nvPr/>
+        </p:nvSpPr>
+        <p:spPr>
+          <a:xfrm>
+            <a:off x="1619250" y="3994150"/>
+            <a:ext cx="4445000" cy="254000"/>
+          </a:xfrm>
+          <a:prstGeom prst="rect">
+            <a:avLst/>
+          </a:prstGeom>
+          <a:noFill/>
+          <a:ln/>
+        </p:spPr>
+        <p:txBody>
+          <a:bodyPr wrap="square" lIns="12700" tIns="12700" rIns="12700" bIns="12700" rtlCol="0" anchor="t">
+            <a:noAutofit/>
+          </a:bodyPr>
+          <a:lstStyle/>
+          <a:p>
+            <a:pPr algn="l" indent="0" marL="0">
+              <a:lnSpc>
+                <a:spcPct val="100000"/>
+              </a:lnSpc>
+              <a:buNone/>
+              <a:defRPr spc="0"/>
+            </a:pPr>
+            <a:r>
+              <a:rPr lang="en-US" sz="1050" dirty="0" spc="0">
+                <a:solidFill>
+                  <a:srgbClr val="000000"/>
+                </a:solidFill>
+                <a:latin typeface="Arial" pitchFamily="34" charset="0"/>
+                <a:ea typeface="Arial" pitchFamily="34" charset="-122"/>
+                <a:cs typeface="Arial" pitchFamily="34" charset="-120"/>
+              </a:rPr>
+              <a:t>Verify every client claim before release.</a:t>
+            </a:r>
+            <a:endParaRPr lang="en-US" sz="1050" dirty="0" spc="0"/>
+          </a:p>
+        </p:txBody>
+      </p:sp>
+      <p:sp>
+        <p:nvSpPr>
+          <p:cNvPr id="25" name="reason-number-03"/>
+          <p:cNvSpPr txBox="1"/>
+          <p:nvPr/>
+        </p:nvSpPr>
+        <p:spPr>
+          <a:xfrm>
+            <a:off x="1047750" y="4451350"/>
+            <a:ext cx="393700" cy="279400"/>
+          </a:xfrm>
+          <a:prstGeom prst="rect">
+            <a:avLst/>
+          </a:prstGeom>
+          <a:noFill/>
+          <a:ln/>
+        </p:spPr>
+        <p:txBody>
+          <a:bodyPr wrap="square" lIns="12700" tIns="12700" rIns="12700" bIns="12700" rtlCol="0" anchor="t">
+            <a:noAutofit/>
+          </a:bodyPr>
+          <a:lstStyle/>
+          <a:p>
+            <a:pPr algn="l" indent="0" marL="0">
+              <a:lnSpc>
+                <a:spcPct val="100000"/>
+              </a:lnSpc>
+              <a:buNone/>
+              <a:defRPr spc="0"/>
+            </a:pPr>
+            <a:r>
+              <a:rPr lang="en-US" sz="1250" b="1" dirty="0" spc="0">
+                <a:solidFill>
+                  <a:srgbClr val="000000"/>
+                </a:solidFill>
+                <a:latin typeface="Arial" pitchFamily="34" charset="0"/>
+                <a:ea typeface="Arial" pitchFamily="34" charset="-122"/>
+                <a:cs typeface="Arial" pitchFamily="34" charset="-120"/>
+              </a:rPr>
+              <a:t>03</a:t>
+            </a:r>
+            <a:endParaRPr lang="en-US" sz="1250" dirty="0" spc="0"/>
+          </a:p>
+        </p:txBody>
+      </p:sp>
+      <p:sp>
+        <p:nvSpPr>
+          <p:cNvPr id="26" name="reason-title-03"/>
+          <p:cNvSpPr txBox="1"/>
+          <p:nvPr/>
+        </p:nvSpPr>
+        <p:spPr>
+          <a:xfrm>
+            <a:off x="1619250" y="4432300"/>
+            <a:ext cx="3429000" cy="222250"/>
+          </a:xfrm>
+          <a:prstGeom prst="rect">
+            <a:avLst/>
+          </a:prstGeom>
+          <a:noFill/>
+          <a:ln/>
+        </p:spPr>
+        <p:txBody>
+          <a:bodyPr wrap="square" lIns="12700" tIns="12700" rIns="12700" bIns="12700" rtlCol="0" anchor="t">
+            <a:noAutofit/>
+          </a:bodyPr>
+          <a:lstStyle/>
+          <a:p>
+            <a:pPr algn="l" indent="0" marL="0">
+              <a:lnSpc>
+                <a:spcPct val="100000"/>
+              </a:lnSpc>
+              <a:buNone/>
+              <a:defRPr spc="0"/>
+            </a:pPr>
+            <a:r>
+              <a:rPr lang="en-US" sz="1250" b="1" dirty="0" spc="0">
+                <a:solidFill>
+                  <a:srgbClr val="000000"/>
+                </a:solidFill>
+                <a:latin typeface="Arial" pitchFamily="34" charset="0"/>
+                <a:ea typeface="Arial" pitchFamily="34" charset="-122"/>
+                <a:cs typeface="Arial" pitchFamily="34" charset="-120"/>
+              </a:rPr>
+              <a:t>Fund against evidence</a:t>
+            </a:r>
+            <a:endParaRPr lang="en-US" sz="1250" dirty="0" spc="0"/>
+          </a:p>
+        </p:txBody>
+      </p:sp>
+      <p:sp>
+        <p:nvSpPr>
+          <p:cNvPr id="27" name="reason-detail-03"/>
+          <p:cNvSpPr txBox="1"/>
+          <p:nvPr/>
+        </p:nvSpPr>
+        <p:spPr>
+          <a:xfrm>
+            <a:off x="1619250" y="4673600"/>
+            <a:ext cx="4445000" cy="254000"/>
+          </a:xfrm>
+          <a:prstGeom prst="rect">
+            <a:avLst/>
+          </a:prstGeom>
+          <a:noFill/>
+          <a:ln/>
+        </p:spPr>
+        <p:txBody>
+          <a:bodyPr wrap="square" lIns="12700" tIns="12700" rIns="12700" bIns="12700" rtlCol="0" anchor="t">
+            <a:noAutofit/>
+          </a:bodyPr>
+          <a:lstStyle/>
+          <a:p>
+            <a:pPr algn="l" indent="0" marL="0">
+              <a:lnSpc>
+                <a:spcPct val="100000"/>
+              </a:lnSpc>
+              <a:buNone/>
+              <a:defRPr spc="0"/>
+            </a:pPr>
+            <a:r>
+              <a:rPr lang="en-US" sz="1050" dirty="0" spc="0">
+                <a:solidFill>
+                  <a:srgbClr val="000000"/>
+                </a:solidFill>
+                <a:latin typeface="Arial" pitchFamily="34" charset="0"/>
+                <a:ea typeface="Arial" pitchFamily="34" charset="-122"/>
+                <a:cs typeface="Arial" pitchFamily="34" charset="-120"/>
+              </a:rPr>
+              <a:t>Practice lead and CFO release $60k only after the week-12 gate.</a:t>
+            </a:r>
+            <a:endParaRPr lang="en-US" sz="1050" dirty="0" spc="0"/>
+          </a:p>
+        </p:txBody>
+      </p:sp>
+      <p:sp>
+        <p:nvSpPr>
+          <p:cNvPr id="28" name="gate-heading"/>
+          <p:cNvSpPr txBox="1"/>
+          <p:nvPr/>
+        </p:nvSpPr>
+        <p:spPr>
+          <a:xfrm>
+            <a:off x="6781800" y="2667000"/>
+            <a:ext cx="5080000" cy="266700"/>
+          </a:xfrm>
+          <a:prstGeom prst="rect">
+            <a:avLst/>
+          </a:prstGeom>
+          <a:noFill/>
+          <a:ln/>
+        </p:spPr>
+        <p:txBody>
+          <a:bodyPr wrap="square" lIns="12700" tIns="12700" rIns="12700" bIns="12700" rtlCol="0" anchor="t">
+            <a:noAutofit/>
+          </a:bodyPr>
+          <a:lstStyle/>
+          <a:p>
+            <a:pPr algn="l" indent="0" marL="0">
+              <a:lnSpc>
+                <a:spcPct val="100000"/>
+              </a:lnSpc>
+              <a:buNone/>
+              <a:defRPr spc="0"/>
+            </a:pPr>
+            <a:r>
+              <a:rPr lang="en-US" sz="1350" b="1" dirty="0" spc="0">
                 <a:solidFill>
                   <a:srgbClr val="000000"/>
                 </a:solidFill>
@@ -2368,893 +3055,20 @@
               </a:rPr>
               <a:t>WEEK-12 SCALE GATE</a:t>
             </a:r>
-            <a:endParaRPr lang="en-US" sz="1400" dirty="0" spc="0"/>
-          </a:p>
-        </p:txBody>
-      </p:sp>
-      <p:sp>
-        <p:nvSpPr>
-          <p:cNvPr id="15" name="baseline"/>
+            <a:endParaRPr lang="en-US" sz="1350" dirty="0" spc="0"/>
+          </a:p>
+        </p:txBody>
+      </p:sp>
+      <p:sp>
+        <p:nvSpPr>
+          <p:cNvPr id="29" name="decision-label"/>
           <p:cNvSpPr txBox="1"/>
           <p:nvPr/>
         </p:nvSpPr>
         <p:spPr>
           <a:xfrm>
-            <a:off x="292100" y="2190750"/>
-            <a:ext cx="3733800" cy="546100"/>
-          </a:xfrm>
-          <a:prstGeom prst="rect">
-            <a:avLst/>
-          </a:prstGeom>
-          <a:noFill/>
-          <a:ln/>
-        </p:spPr>
-        <p:txBody>
-          <a:bodyPr wrap="square" lIns="12700" tIns="12700" rIns="12700" bIns="12700" rtlCol="0" anchor="t">
-            <a:noAutofit/>
-          </a:bodyPr>
-          <a:lstStyle/>
-          <a:p>
-            <a:pPr algn="l" indent="0" marL="0">
-              <a:lnSpc>
-                <a:spcPct val="100000"/>
-              </a:lnSpc>
-              <a:buNone/>
-              <a:defRPr spc="0"/>
-            </a:pPr>
-            <a:r>
-              <a:rPr lang="en-US" sz="3400" b="1" dirty="0" spc="0">
-                <a:solidFill>
-                  <a:srgbClr val="FD5108"/>
-                </a:solidFill>
-                <a:latin typeface="Arial" pitchFamily="34" charset="0"/>
-                <a:ea typeface="Arial" pitchFamily="34" charset="-122"/>
-                <a:cs typeface="Arial" pitchFamily="34" charset="-120"/>
-              </a:rPr>
-              <a:t>10,800 h</a:t>
-            </a:r>
-            <a:endParaRPr lang="en-US" sz="3400" dirty="0" spc="0"/>
-          </a:p>
-        </p:txBody>
-      </p:sp>
-      <p:sp>
-        <p:nvSpPr>
-          <p:cNvPr id="16" name="capacity"/>
-          <p:cNvSpPr txBox="1"/>
-          <p:nvPr/>
-        </p:nvSpPr>
-        <p:spPr>
-          <a:xfrm>
-            <a:off x="292100" y="3333750"/>
-            <a:ext cx="3733800" cy="546100"/>
-          </a:xfrm>
-          <a:prstGeom prst="rect">
-            <a:avLst/>
-          </a:prstGeom>
-          <a:noFill/>
-          <a:ln/>
-        </p:spPr>
-        <p:txBody>
-          <a:bodyPr wrap="square" lIns="12700" tIns="12700" rIns="12700" bIns="12700" rtlCol="0" anchor="t">
-            <a:noAutofit/>
-          </a:bodyPr>
-          <a:lstStyle/>
-          <a:p>
-            <a:pPr algn="l" indent="0" marL="0">
-              <a:lnSpc>
-                <a:spcPct val="100000"/>
-              </a:lnSpc>
-              <a:buNone/>
-              <a:defRPr spc="0"/>
-            </a:pPr>
-            <a:r>
-              <a:rPr lang="en-US" sz="3400" b="1" dirty="0" spc="0">
-                <a:solidFill>
-                  <a:srgbClr val="FD5108"/>
-                </a:solidFill>
-                <a:latin typeface="Arial" pitchFamily="34" charset="0"/>
-                <a:ea typeface="Arial" pitchFamily="34" charset="-122"/>
-                <a:cs typeface="Arial" pitchFamily="34" charset="-120"/>
-              </a:rPr>
-              <a:t>1,944 h</a:t>
-            </a:r>
-            <a:endParaRPr lang="en-US" sz="3400" dirty="0" spc="0"/>
-          </a:p>
-        </p:txBody>
-      </p:sp>
-      <p:sp>
-        <p:nvSpPr>
-          <p:cNvPr id="17" name="capacity-value"/>
-          <p:cNvSpPr txBox="1"/>
-          <p:nvPr/>
-        </p:nvSpPr>
-        <p:spPr>
-          <a:xfrm>
-            <a:off x="292100" y="4432300"/>
-            <a:ext cx="3733800" cy="546100"/>
-          </a:xfrm>
-          <a:prstGeom prst="rect">
-            <a:avLst/>
-          </a:prstGeom>
-          <a:noFill/>
-          <a:ln/>
-        </p:spPr>
-        <p:txBody>
-          <a:bodyPr wrap="square" lIns="12700" tIns="12700" rIns="12700" bIns="12700" rtlCol="0" anchor="t">
-            <a:noAutofit/>
-          </a:bodyPr>
-          <a:lstStyle/>
-          <a:p>
-            <a:pPr algn="l" indent="0" marL="0">
-              <a:lnSpc>
-                <a:spcPct val="100000"/>
-              </a:lnSpc>
-              <a:buNone/>
-              <a:defRPr spc="0"/>
-            </a:pPr>
-            <a:r>
-              <a:rPr lang="en-US" sz="3400" b="1" dirty="0" spc="0">
-                <a:solidFill>
-                  <a:srgbClr val="FD5108"/>
-                </a:solidFill>
-                <a:latin typeface="Arial" pitchFamily="34" charset="0"/>
-                <a:ea typeface="Arial" pitchFamily="34" charset="-122"/>
-                <a:cs typeface="Arial" pitchFamily="34" charset="-120"/>
-              </a:rPr>
-              <a:t>$243k</a:t>
-            </a:r>
-            <a:endParaRPr lang="en-US" sz="3400" dirty="0" spc="0"/>
-          </a:p>
-        </p:txBody>
-      </p:sp>
-      <p:sp>
-        <p:nvSpPr>
-          <p:cNvPr id="18" name="baseline-label"/>
-          <p:cNvSpPr txBox="1"/>
-          <p:nvPr/>
-        </p:nvSpPr>
-        <p:spPr>
-          <a:xfrm>
-            <a:off x="298450" y="2654300"/>
-            <a:ext cx="3835400" cy="266700"/>
-          </a:xfrm>
-          <a:prstGeom prst="rect">
-            <a:avLst/>
-          </a:prstGeom>
-          <a:noFill/>
-          <a:ln/>
-        </p:spPr>
-        <p:txBody>
-          <a:bodyPr wrap="square" lIns="12700" tIns="12700" rIns="12700" bIns="12700" rtlCol="0" anchor="t">
-            <a:noAutofit/>
-          </a:bodyPr>
-          <a:lstStyle/>
-          <a:p>
-            <a:pPr algn="l" indent="0" marL="0">
-              <a:lnSpc>
-                <a:spcPct val="100000"/>
-              </a:lnSpc>
-              <a:buNone/>
-              <a:defRPr spc="0"/>
-            </a:pPr>
-            <a:r>
-              <a:rPr lang="en-US" sz="1400" b="1" dirty="0" spc="0">
-                <a:solidFill>
-                  <a:srgbClr val="000000"/>
-                </a:solidFill>
-                <a:latin typeface="Arial" pitchFamily="34" charset="0"/>
-                <a:ea typeface="Arial" pitchFamily="34" charset="-122"/>
-                <a:cs typeface="Arial" pitchFamily="34" charset="-120"/>
-              </a:rPr>
-              <a:t>Annual research baseline</a:t>
-            </a:r>
-            <a:endParaRPr lang="en-US" sz="1400" dirty="0" spc="0"/>
-          </a:p>
-        </p:txBody>
-      </p:sp>
-      <p:sp>
-        <p:nvSpPr>
-          <p:cNvPr id="19" name="capacity-label"/>
-          <p:cNvSpPr txBox="1"/>
-          <p:nvPr/>
-        </p:nvSpPr>
-        <p:spPr>
-          <a:xfrm>
-            <a:off x="298450" y="3784600"/>
-            <a:ext cx="3835400" cy="266700"/>
-          </a:xfrm>
-          <a:prstGeom prst="rect">
-            <a:avLst/>
-          </a:prstGeom>
-          <a:noFill/>
-          <a:ln/>
-        </p:spPr>
-        <p:txBody>
-          <a:bodyPr wrap="square" lIns="12700" tIns="12700" rIns="12700" bIns="12700" rtlCol="0" anchor="t">
-            <a:noAutofit/>
-          </a:bodyPr>
-          <a:lstStyle/>
-          <a:p>
-            <a:pPr algn="l" indent="0" marL="0">
-              <a:lnSpc>
-                <a:spcPct val="100000"/>
-              </a:lnSpc>
-              <a:buNone/>
-              <a:defRPr spc="0"/>
-            </a:pPr>
-            <a:r>
-              <a:rPr lang="en-US" sz="1400" b="1" dirty="0" spc="0">
-                <a:solidFill>
-                  <a:srgbClr val="000000"/>
-                </a:solidFill>
-                <a:latin typeface="Arial" pitchFamily="34" charset="0"/>
-                <a:ea typeface="Arial" pitchFamily="34" charset="-122"/>
-                <a:cs typeface="Arial" pitchFamily="34" charset="-120"/>
-              </a:rPr>
-              <a:t>Potential annual capacity</a:t>
-            </a:r>
-            <a:endParaRPr lang="en-US" sz="1400" dirty="0" spc="0"/>
-          </a:p>
-        </p:txBody>
-      </p:sp>
-      <p:sp>
-        <p:nvSpPr>
-          <p:cNvPr id="20" name="capacity-value-label"/>
-          <p:cNvSpPr txBox="1"/>
-          <p:nvPr/>
-        </p:nvSpPr>
-        <p:spPr>
-          <a:xfrm>
-            <a:off x="298450" y="4870450"/>
-            <a:ext cx="3835400" cy="266700"/>
-          </a:xfrm>
-          <a:prstGeom prst="rect">
-            <a:avLst/>
-          </a:prstGeom>
-          <a:noFill/>
-          <a:ln/>
-        </p:spPr>
-        <p:txBody>
-          <a:bodyPr wrap="square" lIns="12700" tIns="12700" rIns="12700" bIns="12700" rtlCol="0" anchor="t">
-            <a:noAutofit/>
-          </a:bodyPr>
-          <a:lstStyle/>
-          <a:p>
-            <a:pPr algn="l" indent="0" marL="0">
-              <a:lnSpc>
-                <a:spcPct val="100000"/>
-              </a:lnSpc>
-              <a:buNone/>
-              <a:defRPr spc="0"/>
-            </a:pPr>
-            <a:r>
-              <a:rPr lang="en-US" sz="1400" b="1" dirty="0" spc="0">
-                <a:solidFill>
-                  <a:srgbClr val="000000"/>
-                </a:solidFill>
-                <a:latin typeface="Arial" pitchFamily="34" charset="0"/>
-                <a:ea typeface="Arial" pitchFamily="34" charset="-122"/>
-                <a:cs typeface="Arial" pitchFamily="34" charset="-120"/>
-              </a:rPr>
-              <a:t>Annual capacity equivalent</a:t>
-            </a:r>
-            <a:endParaRPr lang="en-US" sz="1400" dirty="0" spc="0"/>
-          </a:p>
-        </p:txBody>
-      </p:sp>
-      <p:sp>
-        <p:nvSpPr>
-          <p:cNvPr id="21" name="baseline-formula"/>
-          <p:cNvSpPr txBox="1"/>
-          <p:nvPr/>
-        </p:nvSpPr>
-        <p:spPr>
-          <a:xfrm>
-            <a:off x="298450" y="2895600"/>
-            <a:ext cx="3835400" cy="266700"/>
-          </a:xfrm>
-          <a:prstGeom prst="rect">
-            <a:avLst/>
-          </a:prstGeom>
-          <a:noFill/>
-          <a:ln/>
-        </p:spPr>
-        <p:txBody>
-          <a:bodyPr wrap="square" lIns="12700" tIns="12700" rIns="12700" bIns="12700" rtlCol="0" anchor="t">
-            <a:noAutofit/>
-          </a:bodyPr>
-          <a:lstStyle/>
-          <a:p>
-            <a:pPr algn="l" indent="0" marL="0">
-              <a:lnSpc>
-                <a:spcPct val="100000"/>
-              </a:lnSpc>
-              <a:buNone/>
-              <a:defRPr spc="0"/>
-            </a:pPr>
-            <a:r>
-              <a:rPr lang="en-US" sz="1400" dirty="0" spc="0">
-                <a:solidFill>
-                  <a:srgbClr val="000000"/>
-                </a:solidFill>
-                <a:latin typeface="Arial" pitchFamily="34" charset="0"/>
-                <a:ea typeface="Arial" pitchFamily="34" charset="-122"/>
-                <a:cs typeface="Arial" pitchFamily="34" charset="-120"/>
-              </a:rPr>
-              <a:t>900 engagements × 12 h</a:t>
-            </a:r>
-            <a:endParaRPr lang="en-US" sz="1400" dirty="0" spc="0"/>
-          </a:p>
-        </p:txBody>
-      </p:sp>
-      <p:sp>
-        <p:nvSpPr>
-          <p:cNvPr id="22" name="capacity-formula"/>
-          <p:cNvSpPr txBox="1"/>
-          <p:nvPr/>
-        </p:nvSpPr>
-        <p:spPr>
-          <a:xfrm>
-            <a:off x="298450" y="4025900"/>
-            <a:ext cx="3835400" cy="266700"/>
-          </a:xfrm>
-          <a:prstGeom prst="rect">
-            <a:avLst/>
-          </a:prstGeom>
-          <a:noFill/>
-          <a:ln/>
-        </p:spPr>
-        <p:txBody>
-          <a:bodyPr wrap="square" lIns="12700" tIns="12700" rIns="12700" bIns="12700" rtlCol="0" anchor="t">
-            <a:noAutofit/>
-          </a:bodyPr>
-          <a:lstStyle/>
-          <a:p>
-            <a:pPr algn="l" indent="0" marL="0">
-              <a:lnSpc>
-                <a:spcPct val="100000"/>
-              </a:lnSpc>
-              <a:buNone/>
-              <a:defRPr spc="0"/>
-            </a:pPr>
-            <a:r>
-              <a:rPr lang="en-US" sz="1400" dirty="0" spc="0">
-                <a:solidFill>
-                  <a:srgbClr val="000000"/>
-                </a:solidFill>
-                <a:latin typeface="Arial" pitchFamily="34" charset="0"/>
-                <a:ea typeface="Arial" pitchFamily="34" charset="-122"/>
-                <a:cs typeface="Arial" pitchFamily="34" charset="-120"/>
-              </a:rPr>
-              <a:t>60% adoption × 30% time reduction</a:t>
-            </a:r>
-            <a:endParaRPr lang="en-US" sz="1400" dirty="0" spc="0"/>
-          </a:p>
-        </p:txBody>
-      </p:sp>
-      <p:sp>
-        <p:nvSpPr>
-          <p:cNvPr id="23" name="capacity-value-formula"/>
-          <p:cNvSpPr txBox="1"/>
-          <p:nvPr/>
-        </p:nvSpPr>
-        <p:spPr>
-          <a:xfrm>
-            <a:off x="298450" y="5099050"/>
-            <a:ext cx="3835400" cy="266700"/>
-          </a:xfrm>
-          <a:prstGeom prst="rect">
-            <a:avLst/>
-          </a:prstGeom>
-          <a:noFill/>
-          <a:ln/>
-        </p:spPr>
-        <p:txBody>
-          <a:bodyPr wrap="square" lIns="12700" tIns="12700" rIns="12700" bIns="12700" rtlCol="0" anchor="t">
-            <a:noAutofit/>
-          </a:bodyPr>
-          <a:lstStyle/>
-          <a:p>
-            <a:pPr algn="l" indent="0" marL="0">
-              <a:lnSpc>
-                <a:spcPct val="100000"/>
-              </a:lnSpc>
-              <a:buNone/>
-              <a:defRPr spc="0"/>
-            </a:pPr>
-            <a:r>
-              <a:rPr lang="en-US" sz="1400" dirty="0" spc="0">
-                <a:solidFill>
-                  <a:srgbClr val="000000"/>
-                </a:solidFill>
-                <a:latin typeface="Arial" pitchFamily="34" charset="0"/>
-                <a:ea typeface="Arial" pitchFamily="34" charset="-122"/>
-                <a:cs typeface="Arial" pitchFamily="34" charset="-120"/>
-              </a:rPr>
-              <a:t>1,944 h × $125 per hour</a:t>
-            </a:r>
-            <a:endParaRPr lang="en-US" sz="1400" dirty="0" spc="0"/>
-          </a:p>
-        </p:txBody>
-      </p:sp>
-      <p:sp>
-        <p:nvSpPr>
-          <p:cNvPr id="24" name="argument-number-01"/>
-          <p:cNvSpPr txBox="1"/>
-          <p:nvPr/>
-        </p:nvSpPr>
-        <p:spPr>
-          <a:xfrm>
-            <a:off x="4445000" y="2235200"/>
-            <a:ext cx="444500" cy="406400"/>
-          </a:xfrm>
-          <a:prstGeom prst="rect">
-            <a:avLst/>
-          </a:prstGeom>
-          <a:noFill/>
-          <a:ln/>
-        </p:spPr>
-        <p:txBody>
-          <a:bodyPr wrap="square" lIns="0" tIns="0" rIns="0" bIns="0" rtlCol="0" anchor="t">
-            <a:noAutofit/>
-          </a:bodyPr>
-          <a:lstStyle/>
-          <a:p>
-            <a:pPr algn="l" indent="0" marL="0">
-              <a:lnSpc>
-                <a:spcPct val="100000"/>
-              </a:lnSpc>
-              <a:buNone/>
-              <a:defRPr spc="0"/>
-            </a:pPr>
-            <a:r>
-              <a:rPr lang="en-US" sz="2400" b="1" dirty="0" spc="0">
-                <a:solidFill>
-                  <a:srgbClr val="000000"/>
-                </a:solidFill>
-                <a:latin typeface="Arial" pitchFamily="34" charset="0"/>
-                <a:ea typeface="Arial" pitchFamily="34" charset="-122"/>
-                <a:cs typeface="Arial" pitchFamily="34" charset="-120"/>
-              </a:rPr>
-              <a:t>01</a:t>
-            </a:r>
-            <a:endParaRPr lang="en-US" sz="2400" dirty="0" spc="0"/>
-          </a:p>
-        </p:txBody>
-      </p:sp>
-      <p:sp>
-        <p:nvSpPr>
-          <p:cNvPr id="25" name="argument-title-01"/>
-          <p:cNvSpPr txBox="1"/>
-          <p:nvPr/>
-        </p:nvSpPr>
-        <p:spPr>
-          <a:xfrm>
-            <a:off x="4972050" y="2254250"/>
-            <a:ext cx="2781300" cy="279400"/>
-          </a:xfrm>
-          <a:prstGeom prst="rect">
-            <a:avLst/>
-          </a:prstGeom>
-          <a:noFill/>
-          <a:ln/>
-        </p:spPr>
-        <p:txBody>
-          <a:bodyPr wrap="square" lIns="12700" tIns="12700" rIns="12700" bIns="12700" rtlCol="0" anchor="t">
-            <a:noAutofit/>
-          </a:bodyPr>
-          <a:lstStyle/>
-          <a:p>
-            <a:pPr algn="l" indent="0" marL="0">
-              <a:lnSpc>
-                <a:spcPct val="100000"/>
-              </a:lnSpc>
-              <a:buNone/>
-              <a:defRPr spc="0"/>
-            </a:pPr>
-            <a:r>
-              <a:rPr lang="en-US" sz="1400" b="1" dirty="0" spc="0">
-                <a:solidFill>
-                  <a:srgbClr val="000000"/>
-                </a:solidFill>
-                <a:latin typeface="Arial" pitchFamily="34" charset="0"/>
-                <a:ea typeface="Arial" pitchFamily="34" charset="-122"/>
-                <a:cs typeface="Arial" pitchFamily="34" charset="-120"/>
-              </a:rPr>
-              <a:t>Focus a repeatable task</a:t>
-            </a:r>
-            <a:endParaRPr lang="en-US" sz="1400" dirty="0" spc="0"/>
-          </a:p>
-        </p:txBody>
-      </p:sp>
-      <p:sp>
-        <p:nvSpPr>
-          <p:cNvPr id="26" name="argument-detail-01"/>
-          <p:cNvSpPr txBox="1"/>
-          <p:nvPr/>
-        </p:nvSpPr>
-        <p:spPr>
-          <a:xfrm>
-            <a:off x="4972050" y="2476500"/>
-            <a:ext cx="2825750" cy="552450"/>
-          </a:xfrm>
-          <a:prstGeom prst="rect">
-            <a:avLst/>
-          </a:prstGeom>
-          <a:noFill/>
-          <a:ln/>
-        </p:spPr>
-        <p:txBody>
-          <a:bodyPr wrap="square" lIns="12700" tIns="12700" rIns="12700" bIns="12700" rtlCol="0" anchor="t">
-            <a:noAutofit/>
-          </a:bodyPr>
-          <a:lstStyle/>
-          <a:p>
-            <a:pPr algn="l" indent="0" marL="0">
-              <a:lnSpc>
-                <a:spcPct val="130000"/>
-              </a:lnSpc>
-              <a:buNone/>
-              <a:defRPr spc="0"/>
-            </a:pPr>
-            <a:r>
-              <a:rPr lang="en-US" sz="1400" dirty="0" spc="0">
-                <a:solidFill>
-                  <a:srgbClr val="000000"/>
-                </a:solidFill>
-                <a:latin typeface="Arial" pitchFamily="34" charset="0"/>
-                <a:ea typeface="Arial" pitchFamily="34" charset="-122"/>
-                <a:cs typeface="Arial" pitchFamily="34" charset="-120"/>
-              </a:rPr>
-              <a:t>Approved sources, frequent use</a:t>
-            </a:r>
-            <a:endParaRPr lang="en-US" sz="1400" dirty="0" spc="0"/>
-          </a:p>
-          <a:p>
-            <a:pPr algn="l" indent="0" marL="0">
-              <a:lnSpc>
-                <a:spcPct val="130000"/>
-              </a:lnSpc>
-              <a:buNone/>
-              <a:defRPr spc="0"/>
-            </a:pPr>
-            <a:r>
-              <a:rPr lang="en-US" sz="1400" dirty="0" spc="0">
-                <a:solidFill>
-                  <a:srgbClr val="000000"/>
-                </a:solidFill>
-                <a:latin typeface="Arial" pitchFamily="34" charset="0"/>
-                <a:ea typeface="Arial" pitchFamily="34" charset="-122"/>
-                <a:cs typeface="Arial" pitchFamily="34" charset="-120"/>
-              </a:rPr>
-              <a:t>and comparable inputs.</a:t>
-            </a:r>
-            <a:endParaRPr lang="en-US" sz="1400" dirty="0" spc="0"/>
-          </a:p>
-        </p:txBody>
-      </p:sp>
-      <p:sp>
-        <p:nvSpPr>
-          <p:cNvPr id="27" name="argument-number-02"/>
-          <p:cNvSpPr txBox="1"/>
-          <p:nvPr/>
-        </p:nvSpPr>
-        <p:spPr>
-          <a:xfrm>
-            <a:off x="4445000" y="3384550"/>
-            <a:ext cx="444500" cy="406400"/>
-          </a:xfrm>
-          <a:prstGeom prst="rect">
-            <a:avLst/>
-          </a:prstGeom>
-          <a:noFill/>
-          <a:ln/>
-        </p:spPr>
-        <p:txBody>
-          <a:bodyPr wrap="square" lIns="0" tIns="0" rIns="0" bIns="0" rtlCol="0" anchor="t">
-            <a:noAutofit/>
-          </a:bodyPr>
-          <a:lstStyle/>
-          <a:p>
-            <a:pPr algn="l" indent="0" marL="0">
-              <a:lnSpc>
-                <a:spcPct val="100000"/>
-              </a:lnSpc>
-              <a:buNone/>
-              <a:defRPr spc="0"/>
-            </a:pPr>
-            <a:r>
-              <a:rPr lang="en-US" sz="2400" b="1" dirty="0" spc="0">
-                <a:solidFill>
-                  <a:srgbClr val="000000"/>
-                </a:solidFill>
-                <a:latin typeface="Arial" pitchFamily="34" charset="0"/>
-                <a:ea typeface="Arial" pitchFamily="34" charset="-122"/>
-                <a:cs typeface="Arial" pitchFamily="34" charset="-120"/>
-              </a:rPr>
-              <a:t>02</a:t>
-            </a:r>
-            <a:endParaRPr lang="en-US" sz="2400" dirty="0" spc="0"/>
-          </a:p>
-        </p:txBody>
-      </p:sp>
-      <p:sp>
-        <p:nvSpPr>
-          <p:cNvPr id="28" name="argument-title-02"/>
-          <p:cNvSpPr txBox="1"/>
-          <p:nvPr/>
-        </p:nvSpPr>
-        <p:spPr>
-          <a:xfrm>
-            <a:off x="4972050" y="3403600"/>
-            <a:ext cx="2781300" cy="279400"/>
-          </a:xfrm>
-          <a:prstGeom prst="rect">
-            <a:avLst/>
-          </a:prstGeom>
-          <a:noFill/>
-          <a:ln/>
-        </p:spPr>
-        <p:txBody>
-          <a:bodyPr wrap="square" lIns="12700" tIns="12700" rIns="12700" bIns="12700" rtlCol="0" anchor="t">
-            <a:noAutofit/>
-          </a:bodyPr>
-          <a:lstStyle/>
-          <a:p>
-            <a:pPr algn="l" indent="0" marL="0">
-              <a:lnSpc>
-                <a:spcPct val="100000"/>
-              </a:lnSpc>
-              <a:buNone/>
-              <a:defRPr spc="0"/>
-            </a:pPr>
-            <a:r>
-              <a:rPr lang="en-US" sz="1400" b="1" dirty="0" spc="0">
-                <a:solidFill>
-                  <a:srgbClr val="000000"/>
-                </a:solidFill>
-                <a:latin typeface="Arial" pitchFamily="34" charset="0"/>
-                <a:ea typeface="Arial" pitchFamily="34" charset="-122"/>
-                <a:cs typeface="Arial" pitchFamily="34" charset="-120"/>
-              </a:rPr>
-              <a:t>Preserve expert review</a:t>
-            </a:r>
-            <a:endParaRPr lang="en-US" sz="1400" dirty="0" spc="0"/>
-          </a:p>
-        </p:txBody>
-      </p:sp>
-      <p:sp>
-        <p:nvSpPr>
-          <p:cNvPr id="29" name="argument-detail-02"/>
-          <p:cNvSpPr txBox="1"/>
-          <p:nvPr/>
-        </p:nvSpPr>
-        <p:spPr>
-          <a:xfrm>
-            <a:off x="4972050" y="3625850"/>
-            <a:ext cx="2825750" cy="552450"/>
-          </a:xfrm>
-          <a:prstGeom prst="rect">
-            <a:avLst/>
-          </a:prstGeom>
-          <a:noFill/>
-          <a:ln/>
-        </p:spPr>
-        <p:txBody>
-          <a:bodyPr wrap="square" lIns="12700" tIns="12700" rIns="12700" bIns="12700" rtlCol="0" anchor="t">
-            <a:noAutofit/>
-          </a:bodyPr>
-          <a:lstStyle/>
-          <a:p>
-            <a:pPr algn="l" indent="0" marL="0">
-              <a:lnSpc>
-                <a:spcPct val="130000"/>
-              </a:lnSpc>
-              <a:buNone/>
-              <a:defRPr spc="0"/>
-            </a:pPr>
-            <a:r>
-              <a:rPr lang="en-US" sz="1400" dirty="0" spc="0">
-                <a:solidFill>
-                  <a:srgbClr val="000000"/>
-                </a:solidFill>
-                <a:latin typeface="Arial" pitchFamily="34" charset="0"/>
-                <a:ea typeface="Arial" pitchFamily="34" charset="-122"/>
-                <a:cs typeface="Arial" pitchFamily="34" charset="-120"/>
-              </a:rPr>
-              <a:t>Verify every client claim</a:t>
-            </a:r>
-            <a:endParaRPr lang="en-US" sz="1400" dirty="0" spc="0"/>
-          </a:p>
-          <a:p>
-            <a:pPr algn="l" indent="0" marL="0">
-              <a:lnSpc>
-                <a:spcPct val="130000"/>
-              </a:lnSpc>
-              <a:buNone/>
-              <a:defRPr spc="0"/>
-            </a:pPr>
-            <a:r>
-              <a:rPr lang="en-US" sz="1400" dirty="0" spc="0">
-                <a:solidFill>
-                  <a:srgbClr val="000000"/>
-                </a:solidFill>
-                <a:latin typeface="Arial" pitchFamily="34" charset="0"/>
-                <a:ea typeface="Arial" pitchFamily="34" charset="-122"/>
-                <a:cs typeface="Arial" pitchFamily="34" charset="-120"/>
-              </a:rPr>
-              <a:t>before release.</a:t>
-            </a:r>
-            <a:endParaRPr lang="en-US" sz="1400" dirty="0" spc="0"/>
-          </a:p>
-        </p:txBody>
-      </p:sp>
-      <p:sp>
-        <p:nvSpPr>
-          <p:cNvPr id="30" name="argument-number-03"/>
-          <p:cNvSpPr txBox="1"/>
-          <p:nvPr/>
-        </p:nvSpPr>
-        <p:spPr>
-          <a:xfrm>
-            <a:off x="4445000" y="4514850"/>
-            <a:ext cx="444500" cy="406400"/>
-          </a:xfrm>
-          <a:prstGeom prst="rect">
-            <a:avLst/>
-          </a:prstGeom>
-          <a:noFill/>
-          <a:ln/>
-        </p:spPr>
-        <p:txBody>
-          <a:bodyPr wrap="square" lIns="0" tIns="0" rIns="0" bIns="0" rtlCol="0" anchor="t">
-            <a:noAutofit/>
-          </a:bodyPr>
-          <a:lstStyle/>
-          <a:p>
-            <a:pPr algn="l" indent="0" marL="0">
-              <a:lnSpc>
-                <a:spcPct val="100000"/>
-              </a:lnSpc>
-              <a:buNone/>
-              <a:defRPr spc="0"/>
-            </a:pPr>
-            <a:r>
-              <a:rPr lang="en-US" sz="2400" b="1" dirty="0" spc="0">
-                <a:solidFill>
-                  <a:srgbClr val="000000"/>
-                </a:solidFill>
-                <a:latin typeface="Arial" pitchFamily="34" charset="0"/>
-                <a:ea typeface="Arial" pitchFamily="34" charset="-122"/>
-                <a:cs typeface="Arial" pitchFamily="34" charset="-120"/>
-              </a:rPr>
-              <a:t>03</a:t>
-            </a:r>
-            <a:endParaRPr lang="en-US" sz="2400" dirty="0" spc="0"/>
-          </a:p>
-        </p:txBody>
-      </p:sp>
-      <p:sp>
-        <p:nvSpPr>
-          <p:cNvPr id="31" name="argument-title-03"/>
-          <p:cNvSpPr txBox="1"/>
-          <p:nvPr/>
-        </p:nvSpPr>
-        <p:spPr>
-          <a:xfrm>
-            <a:off x="4972050" y="4533900"/>
-            <a:ext cx="2781300" cy="279400"/>
-          </a:xfrm>
-          <a:prstGeom prst="rect">
-            <a:avLst/>
-          </a:prstGeom>
-          <a:noFill/>
-          <a:ln/>
-        </p:spPr>
-        <p:txBody>
-          <a:bodyPr wrap="square" lIns="12700" tIns="12700" rIns="12700" bIns="12700" rtlCol="0" anchor="t">
-            <a:noAutofit/>
-          </a:bodyPr>
-          <a:lstStyle/>
-          <a:p>
-            <a:pPr algn="l" indent="0" marL="0">
-              <a:lnSpc>
-                <a:spcPct val="100000"/>
-              </a:lnSpc>
-              <a:buNone/>
-              <a:defRPr spc="0"/>
-            </a:pPr>
-            <a:r>
-              <a:rPr lang="en-US" sz="1400" b="1" dirty="0" spc="0">
-                <a:solidFill>
-                  <a:srgbClr val="000000"/>
-                </a:solidFill>
-                <a:latin typeface="Arial" pitchFamily="34" charset="0"/>
-                <a:ea typeface="Arial" pitchFamily="34" charset="-122"/>
-                <a:cs typeface="Arial" pitchFamily="34" charset="-120"/>
-              </a:rPr>
-              <a:t>Fund against evidence</a:t>
-            </a:r>
-            <a:endParaRPr lang="en-US" sz="1400" dirty="0" spc="0"/>
-          </a:p>
-        </p:txBody>
-      </p:sp>
-      <p:sp>
-        <p:nvSpPr>
-          <p:cNvPr id="32" name="argument-detail-03"/>
-          <p:cNvSpPr txBox="1"/>
-          <p:nvPr/>
-        </p:nvSpPr>
-        <p:spPr>
-          <a:xfrm>
-            <a:off x="4972050" y="4749800"/>
-            <a:ext cx="2825750" cy="552450"/>
-          </a:xfrm>
-          <a:prstGeom prst="rect">
-            <a:avLst/>
-          </a:prstGeom>
-          <a:noFill/>
-          <a:ln/>
-        </p:spPr>
-        <p:txBody>
-          <a:bodyPr wrap="square" lIns="12700" tIns="12700" rIns="12700" bIns="12700" rtlCol="0" anchor="t">
-            <a:noAutofit/>
-          </a:bodyPr>
-          <a:lstStyle/>
-          <a:p>
-            <a:pPr algn="l" indent="0" marL="0">
-              <a:lnSpc>
-                <a:spcPct val="130000"/>
-              </a:lnSpc>
-              <a:buNone/>
-              <a:defRPr spc="0"/>
-            </a:pPr>
-            <a:r>
-              <a:rPr lang="en-US" sz="1400" dirty="0" spc="0">
-                <a:solidFill>
-                  <a:srgbClr val="000000"/>
-                </a:solidFill>
-                <a:latin typeface="Arial" pitchFamily="34" charset="0"/>
-                <a:ea typeface="Arial" pitchFamily="34" charset="-122"/>
-                <a:cs typeface="Arial" pitchFamily="34" charset="-120"/>
-              </a:rPr>
-              <a:t>Practice lead and CFO release</a:t>
-            </a:r>
-            <a:endParaRPr lang="en-US" sz="1400" dirty="0" spc="0"/>
-          </a:p>
-          <a:p>
-            <a:pPr algn="l" indent="0" marL="0">
-              <a:lnSpc>
-                <a:spcPct val="130000"/>
-              </a:lnSpc>
-              <a:buNone/>
-              <a:defRPr spc="0"/>
-            </a:pPr>
-            <a:r>
-              <a:rPr lang="en-US" sz="1400" dirty="0" spc="0">
-                <a:solidFill>
-                  <a:srgbClr val="000000"/>
-                </a:solidFill>
-                <a:latin typeface="Arial" pitchFamily="34" charset="0"/>
-                <a:ea typeface="Arial" pitchFamily="34" charset="-122"/>
-                <a:cs typeface="Arial" pitchFamily="34" charset="-120"/>
-              </a:rPr>
-              <a:t>$60k only after the week-12 gate.</a:t>
-            </a:r>
-            <a:endParaRPr lang="en-US" sz="1400" dirty="0" spc="0"/>
-          </a:p>
-        </p:txBody>
-      </p:sp>
-      <p:sp>
-        <p:nvSpPr>
-          <p:cNvPr id="33" name="decision-label"/>
-          <p:cNvSpPr txBox="1"/>
-          <p:nvPr/>
-        </p:nvSpPr>
-        <p:spPr>
-          <a:xfrm>
-            <a:off x="635000" y="5689600"/>
-            <a:ext cx="2667000" cy="330200"/>
+            <a:off x="508000" y="5822950"/>
+            <a:ext cx="2730500" cy="317500"/>
           </a:xfrm>
           <a:prstGeom prst="rect">
             <a:avLst/>
@@ -3292,14 +3106,14 @@
       </p:sp>
       <p:sp>
         <p:nvSpPr>
-          <p:cNvPr id="34" name="decision-request"/>
+          <p:cNvPr id="30" name="decision-message"/>
           <p:cNvSpPr txBox="1"/>
           <p:nvPr/>
         </p:nvSpPr>
         <p:spPr>
           <a:xfrm>
-            <a:off x="3556000" y="5689600"/>
-            <a:ext cx="8032750" cy="330200"/>
+            <a:off x="3302000" y="5822950"/>
+            <a:ext cx="8369300" cy="317500"/>
           </a:xfrm>
           <a:prstGeom prst="rect">
             <a:avLst/>
@@ -3335,9 +3149,99 @@
           </a:p>
         </p:txBody>
       </p:sp>
-      <p:sp>
-        <p:nvSpPr>
-          <p:cNvPr id="35" name="Slide Number Placeholder 0"/>
+      <p:pic>
+        <p:nvPicPr>
+          <p:cNvPr id="31" name="reason-icon-01" descr="remix-focus-2-line">    </p:cNvPr>
+          <p:cNvPicPr>
+            <a:picLocks noChangeAspect="1"/>
+          </p:cNvPicPr>
+          <p:nvPr/>
+        </p:nvPicPr>
+        <p:blipFill>
+          <a:blip r:embed="rId1">
+            <a:extLst>
+              <a:ext uri="{96DAC541-7B7A-43D3-8B79-37D633B846F1}">
+                <asvg:svgBlip xmlns:asvg="http://schemas.microsoft.com/office/drawing/2016/SVG/main" r:embed="rId2"/>
+              </a:ext>
+            </a:extLst>
+          </a:blip>
+          <a:stretch>
+            <a:fillRect/>
+          </a:stretch>
+        </p:blipFill>
+        <p:spPr>
+          <a:xfrm>
+            <a:off x="495300" y="3086100"/>
+            <a:ext cx="317500" cy="317500"/>
+          </a:xfrm>
+          <a:prstGeom prst="rect">
+            <a:avLst/>
+          </a:prstGeom>
+        </p:spPr>
+      </p:pic>
+      <p:pic>
+        <p:nvPicPr>
+          <p:cNvPr id="32" name="reason-icon-02" descr="remix-team-line">    </p:cNvPr>
+          <p:cNvPicPr>
+            <a:picLocks noChangeAspect="1"/>
+          </p:cNvPicPr>
+          <p:nvPr/>
+        </p:nvPicPr>
+        <p:blipFill>
+          <a:blip r:embed="rId3">
+            <a:extLst>
+              <a:ext uri="{96DAC541-7B7A-43D3-8B79-37D633B846F1}">
+                <asvg:svgBlip xmlns:asvg="http://schemas.microsoft.com/office/drawing/2016/SVG/main" r:embed="rId4"/>
+              </a:ext>
+            </a:extLst>
+          </a:blip>
+          <a:stretch>
+            <a:fillRect/>
+          </a:stretch>
+        </p:blipFill>
+        <p:spPr>
+          <a:xfrm>
+            <a:off x="495300" y="3765550"/>
+            <a:ext cx="317500" cy="317500"/>
+          </a:xfrm>
+          <a:prstGeom prst="rect">
+            <a:avLst/>
+          </a:prstGeom>
+        </p:spPr>
+      </p:pic>
+      <p:pic>
+        <p:nvPicPr>
+          <p:cNvPr id="33" name="reason-icon-03" descr="remix-shield-check-line">    </p:cNvPr>
+          <p:cNvPicPr>
+            <a:picLocks noChangeAspect="1"/>
+          </p:cNvPicPr>
+          <p:nvPr/>
+        </p:nvPicPr>
+        <p:blipFill>
+          <a:blip r:embed="rId5">
+            <a:extLst>
+              <a:ext uri="{96DAC541-7B7A-43D3-8B79-37D633B846F1}">
+                <asvg:svgBlip xmlns:asvg="http://schemas.microsoft.com/office/drawing/2016/SVG/main" r:embed="rId6"/>
+              </a:ext>
+            </a:extLst>
+          </a:blip>
+          <a:stretch>
+            <a:fillRect/>
+          </a:stretch>
+        </p:blipFill>
+        <p:spPr>
+          <a:xfrm>
+            <a:off x="495300" y="4445000"/>
+            <a:ext cx="317500" cy="317500"/>
+          </a:xfrm>
+          <a:prstGeom prst="rect">
+            <a:avLst/>
+          </a:prstGeom>
+        </p:spPr>
+      </p:pic>
+      <p:sp>
+        <p:nvSpPr>
+          <p:cNvPr id="34" name="Slide Number Placeholder 0"/>
           <p:cNvSpPr>
             <a:spLocks noGrp="1"/>
           </p:cNvSpPr>

--- a/examples/consulting-ai-transformation/run/slides/s01-recommendation/deliverables/slide.pptx
+++ b/examples/consulting-ai-transformation/run/slides/s01-recommendation/deliverables/slide.pptx
@@ -506,7 +506,7 @@
 The 95% gate applies to a sampled test set. Each client release separately requires expert verification and engagement-lead approval.
 At least 11 of 15 pilot users must be weekly active. One comparable research task is measured per pilot engagement.
 [SlidePoise sources]
-Generated target visual: /private/tmp/.slidepoise-rebuild-h51errnw/slides/s01-recommendation/work/accepted-slide.png
+Generated target visual: /Users/henry/Codes/AI_slide_drafting/examples/consulting-ai-transformation/run/slides/s01-recommendation/work/accepted-slide.png
 Canonical asset remix-focus-2-line: /Users/henry/Codes/AI_slide_drafting/examples/consulting-ai-transformation/run/work/icon-cache/focus-2/remix-focus-2-line.svg
 Canonical asset remix-team-line: /Users/henry/Codes/AI_slide_drafting/examples/consulting-ai-transformation/run/work/icon-cache/team/remix-team-line.svg
 Canonical asset remix-shield-check-line: /Users/henry/Codes/AI_slide_drafting/examples/consulting-ai-transformation/run/work/icon-cache/shield-check/remix-shield-check-line.svg</a:t>
@@ -1229,8 +1229,8 @@
         </p:nvSpPr>
         <p:spPr>
           <a:xfrm>
-            <a:off x="4108450" y="1524000"/>
-            <a:ext cx="6350" cy="876300"/>
+            <a:off x="4076700" y="1739900"/>
+            <a:ext cx="6350" cy="889000"/>
           </a:xfrm>
           <a:prstGeom prst="rect">
             <a:avLst/>
@@ -1256,8 +1256,8 @@
         </p:nvSpPr>
         <p:spPr>
           <a:xfrm>
-            <a:off x="8210550" y="1524000"/>
-            <a:ext cx="6350" cy="876300"/>
+            <a:off x="8337550" y="1739900"/>
+            <a:ext cx="6350" cy="889000"/>
           </a:xfrm>
           <a:prstGeom prst="rect">
             <a:avLst/>
@@ -1344,18 +1344,18 @@
           </p:nvPr>
         </p:nvGraphicFramePr>
         <p:xfrm>
-          <a:off x="6781800" y="2959100"/>
-          <a:ext cx="5080000" cy="2108200"/>
+          <a:off x="6731000" y="3251200"/>
+          <a:ext cx="5207000" cy="2120900"/>
         </p:xfrm>
         <a:graphic>
           <a:graphicData uri="http://schemas.openxmlformats.org/drawingml/2006/table">
             <a:tbl>
               <a:tblPr/>
               <a:tblGrid>
-                <a:gridCol w="2794000"/>
-                <a:gridCol w="2286000"/>
+                <a:gridCol w="2857500"/>
+                <a:gridCol w="2349500"/>
               </a:tblGrid>
-              <a:tr h="342900">
+              <a:tr h="381000">
                 <a:tc>
                   <a:txBody>
                     <a:bodyPr>
@@ -1367,7 +1367,7 @@
                         <a:buNone/>
                       </a:pPr>
                       <a:r>
-                        <a:rPr lang="en-US" sz="1100" b="1" dirty="0">
+                        <a:rPr lang="en-US" sz="1200" b="1" dirty="0">
                           <a:solidFill>
                             <a:srgbClr val="FFFFFF"/>
                           </a:solidFill>
@@ -1377,14 +1377,14 @@
                         </a:rPr>
                         <a:t>Measure</a:t>
                       </a:r>
-                      <a:endParaRPr lang="en-US" sz="1100" dirty="0">
+                      <a:endParaRPr lang="en-US" sz="1200" dirty="0">
                         <a:latin typeface="Arial" charset="0"/>
                         <a:ea typeface="Arial" charset="0"/>
                         <a:cs typeface="Arial" charset="0"/>
                       </a:endParaRPr>
                     </a:p>
                   </a:txBody>
-                  <a:tcPr marL="101600" marR="101600" marT="38100" marB="38100" anchor="ctr">
+                  <a:tcPr marL="76200" marR="76200" marT="31750" marB="31750" anchor="ctr">
                     <a:lnL w="6350" cap="flat" cmpd="sng" algn="ctr">
                       <a:solidFill>
                         <a:srgbClr val="C6C9CD"/>
@@ -1433,11 +1433,11 @@
                     </a:bodyPr>
                     <a:lstStyle/>
                     <a:p>
-                      <a:pPr algn="ctr" indent="0" marL="0">
+                      <a:pPr algn="l" indent="0" marL="0">
                         <a:buNone/>
                       </a:pPr>
                       <a:r>
-                        <a:rPr lang="en-US" sz="1100" b="1" dirty="0">
+                        <a:rPr lang="en-US" sz="1200" b="1" dirty="0">
                           <a:solidFill>
                             <a:srgbClr val="FFFFFF"/>
                           </a:solidFill>
@@ -1447,14 +1447,14 @@
                         </a:rPr>
                         <a:t>Minimum to scale</a:t>
                       </a:r>
-                      <a:endParaRPr lang="en-US" sz="1100" dirty="0">
+                      <a:endParaRPr lang="en-US" sz="1200" dirty="0">
                         <a:latin typeface="Arial" charset="0"/>
                         <a:ea typeface="Arial" charset="0"/>
                         <a:cs typeface="Arial" charset="0"/>
                       </a:endParaRPr>
                     </a:p>
                   </a:txBody>
-                  <a:tcPr marL="101600" marR="101600" marT="38100" marB="38100" anchor="ctr">
+                  <a:tcPr marL="76200" marR="76200" marT="31750" marB="31750" anchor="ctr">
                     <a:lnL w="6350" cap="flat" cmpd="sng" algn="ctr">
                       <a:solidFill>
                         <a:srgbClr val="C6C9CD"/>
@@ -1497,7 +1497,7 @@
                   </a:tcPr>
                 </a:tc>
               </a:tr>
-              <a:tr h="438150">
+              <a:tr h="431800">
                 <a:tc>
                   <a:txBody>
                     <a:bodyPr>
@@ -1509,7 +1509,7 @@
                         <a:buNone/>
                       </a:pPr>
                       <a:r>
-                        <a:rPr lang="en-US" sz="1100" b="1" dirty="0">
+                        <a:rPr lang="en-US" sz="1200" b="1" dirty="0">
                           <a:solidFill>
                             <a:srgbClr val="000000"/>
                           </a:solidFill>
@@ -1519,14 +1519,14 @@
                         </a:rPr>
                         <a:t>Cycle-time reduction</a:t>
                       </a:r>
-                      <a:endParaRPr lang="en-US" sz="1100" dirty="0">
+                      <a:endParaRPr lang="en-US" sz="1200" dirty="0">
                         <a:latin typeface="Arial" charset="0"/>
                         <a:ea typeface="Arial" charset="0"/>
                         <a:cs typeface="Arial" charset="0"/>
                       </a:endParaRPr>
                     </a:p>
                   </a:txBody>
-                  <a:tcPr marL="101600" marR="101600" marT="38100" marB="38100" anchor="ctr">
+                  <a:tcPr marL="76200" marR="76200" marT="31750" marB="31750" anchor="ctr">
                     <a:lnL w="6350" cap="flat" cmpd="sng" algn="ctr">
                       <a:solidFill>
                         <a:srgbClr val="C6C9CD"/>
@@ -1575,11 +1575,11 @@
                     </a:bodyPr>
                     <a:lstStyle/>
                     <a:p>
-                      <a:pPr algn="ctr" indent="0" marL="0">
+                      <a:pPr algn="l" indent="0" marL="0">
                         <a:buNone/>
                       </a:pPr>
                       <a:r>
-                        <a:rPr lang="en-US" sz="1100" dirty="0">
+                        <a:rPr lang="en-US" sz="1200" dirty="0">
                           <a:solidFill>
                             <a:srgbClr val="000000"/>
                           </a:solidFill>
@@ -1589,14 +1589,14 @@
                         </a:rPr>
                         <a:t>25%</a:t>
                       </a:r>
-                      <a:endParaRPr lang="en-US" sz="1100" dirty="0">
+                      <a:endParaRPr lang="en-US" sz="1200" dirty="0">
                         <a:latin typeface="Arial" charset="0"/>
                         <a:ea typeface="Arial" charset="0"/>
                         <a:cs typeface="Arial" charset="0"/>
                       </a:endParaRPr>
                     </a:p>
                   </a:txBody>
-                  <a:tcPr marL="101600" marR="101600" marT="38100" marB="38100" anchor="ctr">
+                  <a:tcPr marL="76200" marR="76200" marT="31750" marB="31750" anchor="ctr">
                     <a:lnL w="6350" cap="flat" cmpd="sng" algn="ctr">
                       <a:solidFill>
                         <a:srgbClr val="C6C9CD"/>
@@ -1639,7 +1639,7 @@
                   </a:tcPr>
                 </a:tc>
               </a:tr>
-              <a:tr h="438150">
+              <a:tr h="431800">
                 <a:tc>
                   <a:txBody>
                     <a:bodyPr>
@@ -1651,7 +1651,7 @@
                         <a:buNone/>
                       </a:pPr>
                       <a:r>
-                        <a:rPr lang="en-US" sz="1100" b="1" dirty="0">
+                        <a:rPr lang="en-US" sz="1200" b="1" dirty="0">
                           <a:solidFill>
                             <a:srgbClr val="000000"/>
                           </a:solidFill>
@@ -1661,14 +1661,14 @@
                         </a:rPr>
                         <a:t>Sampled cited claims verified</a:t>
                       </a:r>
-                      <a:endParaRPr lang="en-US" sz="1100" dirty="0">
+                      <a:endParaRPr lang="en-US" sz="1200" dirty="0">
                         <a:latin typeface="Arial" charset="0"/>
                         <a:ea typeface="Arial" charset="0"/>
                         <a:cs typeface="Arial" charset="0"/>
                       </a:endParaRPr>
                     </a:p>
                   </a:txBody>
-                  <a:tcPr marL="101600" marR="101600" marT="38100" marB="38100" anchor="ctr">
+                  <a:tcPr marL="76200" marR="76200" marT="31750" marB="31750" anchor="ctr">
                     <a:lnL w="6350" cap="flat" cmpd="sng" algn="ctr">
                       <a:solidFill>
                         <a:srgbClr val="C6C9CD"/>
@@ -1717,11 +1717,11 @@
                     </a:bodyPr>
                     <a:lstStyle/>
                     <a:p>
-                      <a:pPr algn="ctr" indent="0" marL="0">
+                      <a:pPr algn="l" indent="0" marL="0">
                         <a:buNone/>
                       </a:pPr>
                       <a:r>
-                        <a:rPr lang="en-US" sz="1100" dirty="0">
+                        <a:rPr lang="en-US" sz="1200" dirty="0">
                           <a:solidFill>
                             <a:srgbClr val="000000"/>
                           </a:solidFill>
@@ -1731,14 +1731,14 @@
                         </a:rPr>
                         <a:t>95%</a:t>
                       </a:r>
-                      <a:endParaRPr lang="en-US" sz="1100" dirty="0">
+                      <a:endParaRPr lang="en-US" sz="1200" dirty="0">
                         <a:latin typeface="Arial" charset="0"/>
                         <a:ea typeface="Arial" charset="0"/>
                         <a:cs typeface="Arial" charset="0"/>
                       </a:endParaRPr>
                     </a:p>
                   </a:txBody>
-                  <a:tcPr marL="101600" marR="101600" marT="38100" marB="38100" anchor="ctr">
+                  <a:tcPr marL="76200" marR="76200" marT="31750" marB="31750" anchor="ctr">
                     <a:lnL w="6350" cap="flat" cmpd="sng" algn="ctr">
                       <a:solidFill>
                         <a:srgbClr val="C6C9CD"/>
@@ -1781,7 +1781,7 @@
                   </a:tcPr>
                 </a:tc>
               </a:tr>
-              <a:tr h="438150">
+              <a:tr h="431800">
                 <a:tc>
                   <a:txBody>
                     <a:bodyPr>
@@ -1793,7 +1793,7 @@
                         <a:buNone/>
                       </a:pPr>
                       <a:r>
-                        <a:rPr lang="en-US" sz="1100" b="1" dirty="0">
+                        <a:rPr lang="en-US" sz="1200" b="1" dirty="0">
                           <a:solidFill>
                             <a:srgbClr val="000000"/>
                           </a:solidFill>
@@ -1803,14 +1803,14 @@
                         </a:rPr>
                         <a:t>Critical data exceptions</a:t>
                       </a:r>
-                      <a:endParaRPr lang="en-US" sz="1100" dirty="0">
+                      <a:endParaRPr lang="en-US" sz="1200" dirty="0">
                         <a:latin typeface="Arial" charset="0"/>
                         <a:ea typeface="Arial" charset="0"/>
                         <a:cs typeface="Arial" charset="0"/>
                       </a:endParaRPr>
                     </a:p>
                   </a:txBody>
-                  <a:tcPr marL="101600" marR="101600" marT="38100" marB="38100" anchor="ctr">
+                  <a:tcPr marL="76200" marR="76200" marT="31750" marB="31750" anchor="ctr">
                     <a:lnL w="6350" cap="flat" cmpd="sng" algn="ctr">
                       <a:solidFill>
                         <a:srgbClr val="C6C9CD"/>
@@ -1859,11 +1859,11 @@
                     </a:bodyPr>
                     <a:lstStyle/>
                     <a:p>
-                      <a:pPr algn="ctr" indent="0" marL="0">
+                      <a:pPr algn="l" indent="0" marL="0">
                         <a:buNone/>
                       </a:pPr>
                       <a:r>
-                        <a:rPr lang="en-US" sz="1100" dirty="0">
+                        <a:rPr lang="en-US" sz="1200" dirty="0">
                           <a:solidFill>
                             <a:srgbClr val="000000"/>
                           </a:solidFill>
@@ -1873,14 +1873,14 @@
                         </a:rPr>
                         <a:t>0</a:t>
                       </a:r>
-                      <a:endParaRPr lang="en-US" sz="1100" dirty="0">
+                      <a:endParaRPr lang="en-US" sz="1200" dirty="0">
                         <a:latin typeface="Arial" charset="0"/>
                         <a:ea typeface="Arial" charset="0"/>
                         <a:cs typeface="Arial" charset="0"/>
                       </a:endParaRPr>
                     </a:p>
                   </a:txBody>
-                  <a:tcPr marL="101600" marR="101600" marT="38100" marB="38100" anchor="ctr">
+                  <a:tcPr marL="76200" marR="76200" marT="31750" marB="31750" anchor="ctr">
                     <a:lnL w="6350" cap="flat" cmpd="sng" algn="ctr">
                       <a:solidFill>
                         <a:srgbClr val="C6C9CD"/>
@@ -1923,7 +1923,7 @@
                   </a:tcPr>
                 </a:tc>
               </a:tr>
-              <a:tr h="450850">
+              <a:tr h="444500">
                 <a:tc>
                   <a:txBody>
                     <a:bodyPr>
@@ -1935,7 +1935,7 @@
                         <a:buNone/>
                       </a:pPr>
                       <a:r>
-                        <a:rPr lang="en-US" sz="1100" b="1" dirty="0">
+                        <a:rPr lang="en-US" sz="1200" b="1" dirty="0">
                           <a:solidFill>
                             <a:srgbClr val="000000"/>
                           </a:solidFill>
@@ -1945,14 +1945,14 @@
                         </a:rPr>
                         <a:t>Weekly-active pilot users</a:t>
                       </a:r>
-                      <a:endParaRPr lang="en-US" sz="1100" dirty="0">
+                      <a:endParaRPr lang="en-US" sz="1200" dirty="0">
                         <a:latin typeface="Arial" charset="0"/>
                         <a:ea typeface="Arial" charset="0"/>
                         <a:cs typeface="Arial" charset="0"/>
                       </a:endParaRPr>
                     </a:p>
                   </a:txBody>
-                  <a:tcPr marL="101600" marR="101600" marT="38100" marB="38100" anchor="ctr">
+                  <a:tcPr marL="76200" marR="76200" marT="31750" marB="31750" anchor="ctr">
                     <a:lnL w="6350" cap="flat" cmpd="sng" algn="ctr">
                       <a:solidFill>
                         <a:srgbClr val="C6C9CD"/>
@@ -2001,11 +2001,11 @@
                     </a:bodyPr>
                     <a:lstStyle/>
                     <a:p>
-                      <a:pPr algn="ctr" indent="0" marL="0">
+                      <a:pPr algn="l" indent="0" marL="0">
                         <a:buNone/>
                       </a:pPr>
                       <a:r>
-                        <a:rPr lang="en-US" sz="1100" dirty="0">
+                        <a:rPr lang="en-US" sz="1200" dirty="0">
                           <a:solidFill>
                             <a:srgbClr val="000000"/>
                           </a:solidFill>
@@ -2015,14 +2015,14 @@
                         </a:rPr>
                         <a:t>70% · at least 11 of 15</a:t>
                       </a:r>
-                      <a:endParaRPr lang="en-US" sz="1100" dirty="0">
+                      <a:endParaRPr lang="en-US" sz="1200" dirty="0">
                         <a:latin typeface="Arial" charset="0"/>
                         <a:ea typeface="Arial" charset="0"/>
                         <a:cs typeface="Arial" charset="0"/>
                       </a:endParaRPr>
                     </a:p>
                   </a:txBody>
-                  <a:tcPr marL="101600" marR="101600" marT="38100" marB="38100" anchor="ctr">
+                  <a:tcPr marL="76200" marR="76200" marT="31750" marB="31750" anchor="ctr">
                     <a:lnL w="6350" cap="flat" cmpd="sng" algn="ctr">
                       <a:solidFill>
                         <a:srgbClr val="C6C9CD"/>
@@ -2167,8 +2167,8 @@
         </p:nvSpPr>
         <p:spPr>
           <a:xfrm>
-            <a:off x="298450" y="1524000"/>
-            <a:ext cx="3175000" cy="444500"/>
+            <a:off x="298450" y="1619250"/>
+            <a:ext cx="3175000" cy="596900"/>
           </a:xfrm>
           <a:prstGeom prst="rect">
             <a:avLst/>
@@ -2190,7 +2190,7 @@
               <a:defRPr spc="0"/>
             </a:pPr>
             <a:r>
-              <a:rPr lang="en-US" sz="2900" b="1" dirty="0" spc="0">
+              <a:rPr lang="en-US" sz="4000" b="1" dirty="0" spc="0">
                 <a:solidFill>
                   <a:srgbClr val="FD5108"/>
                 </a:solidFill>
@@ -2200,7 +2200,7 @@
               </a:rPr>
               <a:t>10,800 h</a:t>
             </a:r>
-            <a:endParaRPr lang="en-US" sz="2900" dirty="0" spc="0"/>
+            <a:endParaRPr lang="en-US" sz="4000" dirty="0" spc="0"/>
           </a:p>
         </p:txBody>
       </p:sp>
@@ -2212,8 +2212,8 @@
         </p:nvSpPr>
         <p:spPr>
           <a:xfrm>
-            <a:off x="298450" y="1981200"/>
-            <a:ext cx="3302000" cy="203200"/>
+            <a:off x="298450" y="2197100"/>
+            <a:ext cx="3175000" cy="241300"/>
           </a:xfrm>
           <a:prstGeom prst="rect">
             <a:avLst/>
@@ -2235,7 +2235,7 @@
               <a:defRPr spc="0"/>
             </a:pPr>
             <a:r>
-              <a:rPr lang="en-US" sz="1250" b="1" dirty="0" spc="0">
+              <a:rPr lang="en-US" sz="1400" b="1" dirty="0" spc="0">
                 <a:solidFill>
                   <a:srgbClr val="000000"/>
                 </a:solidFill>
@@ -2245,7 +2245,7 @@
               </a:rPr>
               <a:t>Annual research baseline</a:t>
             </a:r>
-            <a:endParaRPr lang="en-US" sz="1250" dirty="0" spc="0"/>
+            <a:endParaRPr lang="en-US" sz="1400" dirty="0" spc="0"/>
           </a:p>
         </p:txBody>
       </p:sp>
@@ -2257,8 +2257,8 @@
         </p:nvSpPr>
         <p:spPr>
           <a:xfrm>
-            <a:off x="298450" y="2197100"/>
-            <a:ext cx="3302000" cy="203200"/>
+            <a:off x="298450" y="2476500"/>
+            <a:ext cx="3175000" cy="266700"/>
           </a:xfrm>
           <a:prstGeom prst="rect">
             <a:avLst/>
@@ -2280,7 +2280,7 @@
               <a:defRPr spc="0"/>
             </a:pPr>
             <a:r>
-              <a:rPr lang="en-US" sz="1150" dirty="0" spc="0">
+              <a:rPr lang="en-US" sz="1300" dirty="0" spc="0">
                 <a:solidFill>
                   <a:srgbClr val="000000"/>
                 </a:solidFill>
@@ -2290,7 +2290,7 @@
               </a:rPr>
               <a:t>900 engagements × 12 h</a:t>
             </a:r>
-            <a:endParaRPr lang="en-US" sz="1150" dirty="0" spc="0"/>
+            <a:endParaRPr lang="en-US" sz="1300" dirty="0" spc="0"/>
           </a:p>
         </p:txBody>
       </p:sp>
@@ -2302,8 +2302,8 @@
         </p:nvSpPr>
         <p:spPr>
           <a:xfrm>
-            <a:off x="4406900" y="1524000"/>
-            <a:ext cx="3175000" cy="444500"/>
+            <a:off x="4584700" y="1619250"/>
+            <a:ext cx="3175000" cy="596900"/>
           </a:xfrm>
           <a:prstGeom prst="rect">
             <a:avLst/>
@@ -2325,7 +2325,7 @@
               <a:defRPr spc="0"/>
             </a:pPr>
             <a:r>
-              <a:rPr lang="en-US" sz="2900" b="1" dirty="0" spc="0">
+              <a:rPr lang="en-US" sz="4000" b="1" dirty="0" spc="0">
                 <a:solidFill>
                   <a:srgbClr val="FD5108"/>
                 </a:solidFill>
@@ -2335,7 +2335,7 @@
               </a:rPr>
               <a:t>1,944 h</a:t>
             </a:r>
-            <a:endParaRPr lang="en-US" sz="2900" dirty="0" spc="0"/>
+            <a:endParaRPr lang="en-US" sz="4000" dirty="0" spc="0"/>
           </a:p>
         </p:txBody>
       </p:sp>
@@ -2347,8 +2347,8 @@
         </p:nvSpPr>
         <p:spPr>
           <a:xfrm>
-            <a:off x="4406900" y="1981200"/>
-            <a:ext cx="3302000" cy="203200"/>
+            <a:off x="4584700" y="2197100"/>
+            <a:ext cx="3175000" cy="241300"/>
           </a:xfrm>
           <a:prstGeom prst="rect">
             <a:avLst/>
@@ -2370,7 +2370,7 @@
               <a:defRPr spc="0"/>
             </a:pPr>
             <a:r>
-              <a:rPr lang="en-US" sz="1250" b="1" dirty="0" spc="0">
+              <a:rPr lang="en-US" sz="1400" b="1" dirty="0" spc="0">
                 <a:solidFill>
                   <a:srgbClr val="000000"/>
                 </a:solidFill>
@@ -2380,7 +2380,7 @@
               </a:rPr>
               <a:t>Potential annual capacity</a:t>
             </a:r>
-            <a:endParaRPr lang="en-US" sz="1250" dirty="0" spc="0"/>
+            <a:endParaRPr lang="en-US" sz="1400" dirty="0" spc="0"/>
           </a:p>
         </p:txBody>
       </p:sp>
@@ -2392,8 +2392,8 @@
         </p:nvSpPr>
         <p:spPr>
           <a:xfrm>
-            <a:off x="4406900" y="2197100"/>
-            <a:ext cx="3302000" cy="203200"/>
+            <a:off x="4584700" y="2476500"/>
+            <a:ext cx="3175000" cy="266700"/>
           </a:xfrm>
           <a:prstGeom prst="rect">
             <a:avLst/>
@@ -2415,7 +2415,7 @@
               <a:defRPr spc="0"/>
             </a:pPr>
             <a:r>
-              <a:rPr lang="en-US" sz="1150" dirty="0" spc="0">
+              <a:rPr lang="en-US" sz="1300" dirty="0" spc="0">
                 <a:solidFill>
                   <a:srgbClr val="000000"/>
                 </a:solidFill>
@@ -2425,7 +2425,7 @@
               </a:rPr>
               <a:t>60% adoption × 30% time reduction</a:t>
             </a:r>
-            <a:endParaRPr lang="en-US" sz="1150" dirty="0" spc="0"/>
+            <a:endParaRPr lang="en-US" sz="1300" dirty="0" spc="0"/>
           </a:p>
         </p:txBody>
       </p:sp>
@@ -2437,8 +2437,8 @@
         </p:nvSpPr>
         <p:spPr>
           <a:xfrm>
-            <a:off x="8509000" y="1524000"/>
-            <a:ext cx="3175000" cy="444500"/>
+            <a:off x="8940800" y="1619250"/>
+            <a:ext cx="3175000" cy="596900"/>
           </a:xfrm>
           <a:prstGeom prst="rect">
             <a:avLst/>
@@ -2460,7 +2460,7 @@
               <a:defRPr spc="0"/>
             </a:pPr>
             <a:r>
-              <a:rPr lang="en-US" sz="2900" b="1" dirty="0" spc="0">
+              <a:rPr lang="en-US" sz="4000" b="1" dirty="0" spc="0">
                 <a:solidFill>
                   <a:srgbClr val="FD5108"/>
                 </a:solidFill>
@@ -2470,7 +2470,7 @@
               </a:rPr>
               <a:t>$243k</a:t>
             </a:r>
-            <a:endParaRPr lang="en-US" sz="2900" dirty="0" spc="0"/>
+            <a:endParaRPr lang="en-US" sz="4000" dirty="0" spc="0"/>
           </a:p>
         </p:txBody>
       </p:sp>
@@ -2482,8 +2482,8 @@
         </p:nvSpPr>
         <p:spPr>
           <a:xfrm>
-            <a:off x="8509000" y="1981200"/>
-            <a:ext cx="3302000" cy="203200"/>
+            <a:off x="8940800" y="2197100"/>
+            <a:ext cx="3175000" cy="241300"/>
           </a:xfrm>
           <a:prstGeom prst="rect">
             <a:avLst/>
@@ -2505,7 +2505,7 @@
               <a:defRPr spc="0"/>
             </a:pPr>
             <a:r>
-              <a:rPr lang="en-US" sz="1250" b="1" dirty="0" spc="0">
+              <a:rPr lang="en-US" sz="1400" b="1" dirty="0" spc="0">
                 <a:solidFill>
                   <a:srgbClr val="000000"/>
                 </a:solidFill>
@@ -2515,7 +2515,7 @@
               </a:rPr>
               <a:t>Annual capacity equivalent</a:t>
             </a:r>
-            <a:endParaRPr lang="en-US" sz="1250" dirty="0" spc="0"/>
+            <a:endParaRPr lang="en-US" sz="1400" dirty="0" spc="0"/>
           </a:p>
         </p:txBody>
       </p:sp>
@@ -2527,8 +2527,8 @@
         </p:nvSpPr>
         <p:spPr>
           <a:xfrm>
-            <a:off x="8509000" y="2197100"/>
-            <a:ext cx="3302000" cy="203200"/>
+            <a:off x="8940800" y="2476500"/>
+            <a:ext cx="3175000" cy="266700"/>
           </a:xfrm>
           <a:prstGeom prst="rect">
             <a:avLst/>
@@ -2550,7 +2550,7 @@
               <a:defRPr spc="0"/>
             </a:pPr>
             <a:r>
-              <a:rPr lang="en-US" sz="1150" dirty="0" spc="0">
+              <a:rPr lang="en-US" sz="1300" dirty="0" spc="0">
                 <a:solidFill>
                   <a:srgbClr val="000000"/>
                 </a:solidFill>
@@ -2560,7 +2560,7 @@
               </a:rPr>
               <a:t>1,944 h × $125 per hour</a:t>
             </a:r>
-            <a:endParaRPr lang="en-US" sz="1150" dirty="0" spc="0"/>
+            <a:endParaRPr lang="en-US" sz="1300" dirty="0" spc="0"/>
           </a:p>
         </p:txBody>
       </p:sp>
@@ -2572,8 +2572,8 @@
         </p:nvSpPr>
         <p:spPr>
           <a:xfrm>
-            <a:off x="298450" y="2667000"/>
-            <a:ext cx="5397500" cy="266700"/>
+            <a:off x="298450" y="2927350"/>
+            <a:ext cx="5778500" cy="266700"/>
           </a:xfrm>
           <a:prstGeom prst="rect">
             <a:avLst/>
@@ -2595,7 +2595,7 @@
               <a:defRPr spc="0"/>
             </a:pPr>
             <a:r>
-              <a:rPr lang="en-US" sz="1350" b="1" dirty="0" spc="0">
+              <a:rPr lang="en-US" sz="1400" b="1" dirty="0" spc="0">
                 <a:solidFill>
                   <a:srgbClr val="000000"/>
                 </a:solidFill>
@@ -2605,7 +2605,7 @@
               </a:rPr>
               <a:t>WHY THIS PILOT FIRST</a:t>
             </a:r>
-            <a:endParaRPr lang="en-US" sz="1350" dirty="0" spc="0"/>
+            <a:endParaRPr lang="en-US" sz="1400" dirty="0" spc="0"/>
           </a:p>
         </p:txBody>
       </p:sp>
@@ -2617,8 +2617,8 @@
         </p:nvSpPr>
         <p:spPr>
           <a:xfrm>
-            <a:off x="1047750" y="3092450"/>
-            <a:ext cx="393700" cy="279400"/>
+            <a:off x="1358900" y="3302000"/>
+            <a:ext cx="412750" cy="254000"/>
           </a:xfrm>
           <a:prstGeom prst="rect">
             <a:avLst/>
@@ -2640,7 +2640,7 @@
               <a:defRPr spc="0"/>
             </a:pPr>
             <a:r>
-              <a:rPr lang="en-US" sz="1250" b="1" dirty="0" spc="0">
+              <a:rPr lang="en-US" sz="1500" b="1" dirty="0" spc="0">
                 <a:solidFill>
                   <a:srgbClr val="000000"/>
                 </a:solidFill>
@@ -2650,7 +2650,7 @@
               </a:rPr>
               <a:t>01</a:t>
             </a:r>
-            <a:endParaRPr lang="en-US" sz="1250" dirty="0" spc="0"/>
+            <a:endParaRPr lang="en-US" sz="1500" dirty="0" spc="0"/>
           </a:p>
         </p:txBody>
       </p:sp>
@@ -2662,8 +2662,8 @@
         </p:nvSpPr>
         <p:spPr>
           <a:xfrm>
-            <a:off x="1619250" y="3073400"/>
-            <a:ext cx="3429000" cy="222250"/>
+            <a:off x="1936750" y="3314700"/>
+            <a:ext cx="4445000" cy="241300"/>
           </a:xfrm>
           <a:prstGeom prst="rect">
             <a:avLst/>
@@ -2685,7 +2685,7 @@
               <a:defRPr spc="0"/>
             </a:pPr>
             <a:r>
-              <a:rPr lang="en-US" sz="1250" b="1" dirty="0" spc="0">
+              <a:rPr lang="en-US" sz="1400" b="1" dirty="0" spc="0">
                 <a:solidFill>
                   <a:srgbClr val="000000"/>
                 </a:solidFill>
@@ -2695,7 +2695,7 @@
               </a:rPr>
               <a:t>Focus a repeatable task</a:t>
             </a:r>
-            <a:endParaRPr lang="en-US" sz="1250" dirty="0" spc="0"/>
+            <a:endParaRPr lang="en-US" sz="1400" dirty="0" spc="0"/>
           </a:p>
         </p:txBody>
       </p:sp>
@@ -2707,8 +2707,8 @@
         </p:nvSpPr>
         <p:spPr>
           <a:xfrm>
-            <a:off x="1619250" y="3314700"/>
-            <a:ext cx="4445000" cy="254000"/>
+            <a:off x="1936750" y="3581400"/>
+            <a:ext cx="4635500" cy="412750"/>
           </a:xfrm>
           <a:prstGeom prst="rect">
             <a:avLst/>
@@ -2730,7 +2730,7 @@
               <a:defRPr spc="0"/>
             </a:pPr>
             <a:r>
-              <a:rPr lang="en-US" sz="1050" dirty="0" spc="0">
+              <a:rPr lang="en-US" sz="1300" dirty="0" spc="0">
                 <a:solidFill>
                   <a:srgbClr val="000000"/>
                 </a:solidFill>
@@ -2740,7 +2740,7 @@
               </a:rPr>
               <a:t>Approved sources, frequent use and comparable inputs.</a:t>
             </a:r>
-            <a:endParaRPr lang="en-US" sz="1050" dirty="0" spc="0"/>
+            <a:endParaRPr lang="en-US" sz="1300" dirty="0" spc="0"/>
           </a:p>
         </p:txBody>
       </p:sp>
@@ -2752,8 +2752,8 @@
         </p:nvSpPr>
         <p:spPr>
           <a:xfrm>
-            <a:off x="1047750" y="3771900"/>
-            <a:ext cx="393700" cy="279400"/>
+            <a:off x="1358900" y="4089400"/>
+            <a:ext cx="412750" cy="254000"/>
           </a:xfrm>
           <a:prstGeom prst="rect">
             <a:avLst/>
@@ -2775,7 +2775,7 @@
               <a:defRPr spc="0"/>
             </a:pPr>
             <a:r>
-              <a:rPr lang="en-US" sz="1250" b="1" dirty="0" spc="0">
+              <a:rPr lang="en-US" sz="1500" b="1" dirty="0" spc="0">
                 <a:solidFill>
                   <a:srgbClr val="000000"/>
                 </a:solidFill>
@@ -2785,7 +2785,7 @@
               </a:rPr>
               <a:t>02</a:t>
             </a:r>
-            <a:endParaRPr lang="en-US" sz="1250" dirty="0" spc="0"/>
+            <a:endParaRPr lang="en-US" sz="1500" dirty="0" spc="0"/>
           </a:p>
         </p:txBody>
       </p:sp>
@@ -2797,8 +2797,8 @@
         </p:nvSpPr>
         <p:spPr>
           <a:xfrm>
-            <a:off x="1619250" y="3752850"/>
-            <a:ext cx="3429000" cy="222250"/>
+            <a:off x="1936750" y="4102100"/>
+            <a:ext cx="4445000" cy="241300"/>
           </a:xfrm>
           <a:prstGeom prst="rect">
             <a:avLst/>
@@ -2820,7 +2820,7 @@
               <a:defRPr spc="0"/>
             </a:pPr>
             <a:r>
-              <a:rPr lang="en-US" sz="1250" b="1" dirty="0" spc="0">
+              <a:rPr lang="en-US" sz="1400" b="1" dirty="0" spc="0">
                 <a:solidFill>
                   <a:srgbClr val="000000"/>
                 </a:solidFill>
@@ -2830,7 +2830,7 @@
               </a:rPr>
               <a:t>Preserve expert review</a:t>
             </a:r>
-            <a:endParaRPr lang="en-US" sz="1250" dirty="0" spc="0"/>
+            <a:endParaRPr lang="en-US" sz="1400" dirty="0" spc="0"/>
           </a:p>
         </p:txBody>
       </p:sp>
@@ -2842,8 +2842,8 @@
         </p:nvSpPr>
         <p:spPr>
           <a:xfrm>
-            <a:off x="1619250" y="3994150"/>
-            <a:ext cx="4445000" cy="254000"/>
+            <a:off x="1936750" y="4368800"/>
+            <a:ext cx="4635500" cy="412750"/>
           </a:xfrm>
           <a:prstGeom prst="rect">
             <a:avLst/>
@@ -2865,7 +2865,7 @@
               <a:defRPr spc="0"/>
             </a:pPr>
             <a:r>
-              <a:rPr lang="en-US" sz="1050" dirty="0" spc="0">
+              <a:rPr lang="en-US" sz="1300" dirty="0" spc="0">
                 <a:solidFill>
                   <a:srgbClr val="000000"/>
                 </a:solidFill>
@@ -2875,7 +2875,7 @@
               </a:rPr>
               <a:t>Verify every client claim before release.</a:t>
             </a:r>
-            <a:endParaRPr lang="en-US" sz="1050" dirty="0" spc="0"/>
+            <a:endParaRPr lang="en-US" sz="1300" dirty="0" spc="0"/>
           </a:p>
         </p:txBody>
       </p:sp>
@@ -2887,8 +2887,8 @@
         </p:nvSpPr>
         <p:spPr>
           <a:xfrm>
-            <a:off x="1047750" y="4451350"/>
-            <a:ext cx="393700" cy="279400"/>
+            <a:off x="1358900" y="4851400"/>
+            <a:ext cx="412750" cy="254000"/>
           </a:xfrm>
           <a:prstGeom prst="rect">
             <a:avLst/>
@@ -2910,7 +2910,7 @@
               <a:defRPr spc="0"/>
             </a:pPr>
             <a:r>
-              <a:rPr lang="en-US" sz="1250" b="1" dirty="0" spc="0">
+              <a:rPr lang="en-US" sz="1500" b="1" dirty="0" spc="0">
                 <a:solidFill>
                   <a:srgbClr val="000000"/>
                 </a:solidFill>
@@ -2920,7 +2920,7 @@
               </a:rPr>
               <a:t>03</a:t>
             </a:r>
-            <a:endParaRPr lang="en-US" sz="1250" dirty="0" spc="0"/>
+            <a:endParaRPr lang="en-US" sz="1500" dirty="0" spc="0"/>
           </a:p>
         </p:txBody>
       </p:sp>
@@ -2932,8 +2932,8 @@
         </p:nvSpPr>
         <p:spPr>
           <a:xfrm>
-            <a:off x="1619250" y="4432300"/>
-            <a:ext cx="3429000" cy="222250"/>
+            <a:off x="1936750" y="4864100"/>
+            <a:ext cx="4445000" cy="241300"/>
           </a:xfrm>
           <a:prstGeom prst="rect">
             <a:avLst/>
@@ -2955,7 +2955,7 @@
               <a:defRPr spc="0"/>
             </a:pPr>
             <a:r>
-              <a:rPr lang="en-US" sz="1250" b="1" dirty="0" spc="0">
+              <a:rPr lang="en-US" sz="1400" b="1" dirty="0" spc="0">
                 <a:solidFill>
                   <a:srgbClr val="000000"/>
                 </a:solidFill>
@@ -2965,7 +2965,7 @@
               </a:rPr>
               <a:t>Fund against evidence</a:t>
             </a:r>
-            <a:endParaRPr lang="en-US" sz="1250" dirty="0" spc="0"/>
+            <a:endParaRPr lang="en-US" sz="1400" dirty="0" spc="0"/>
           </a:p>
         </p:txBody>
       </p:sp>
@@ -2977,8 +2977,8 @@
         </p:nvSpPr>
         <p:spPr>
           <a:xfrm>
-            <a:off x="1619250" y="4673600"/>
-            <a:ext cx="4445000" cy="254000"/>
+            <a:off x="1936750" y="5130800"/>
+            <a:ext cx="4635500" cy="412750"/>
           </a:xfrm>
           <a:prstGeom prst="rect">
             <a:avLst/>
@@ -3000,7 +3000,7 @@
               <a:defRPr spc="0"/>
             </a:pPr>
             <a:r>
-              <a:rPr lang="en-US" sz="1050" dirty="0" spc="0">
+              <a:rPr lang="en-US" sz="1300" dirty="0" spc="0">
                 <a:solidFill>
                   <a:srgbClr val="000000"/>
                 </a:solidFill>
@@ -3008,34 +3008,10 @@
                 <a:ea typeface="Arial" pitchFamily="34" charset="-122"/>
                 <a:cs typeface="Arial" pitchFamily="34" charset="-120"/>
               </a:rPr>
-              <a:t>Practice lead and CFO release $60k only after the week-12 gate.</a:t>
+              <a:t>Practice lead and CFO release $60k</a:t>
             </a:r>
-            <a:endParaRPr lang="en-US" sz="1050" dirty="0" spc="0"/>
-          </a:p>
-        </p:txBody>
-      </p:sp>
-      <p:sp>
-        <p:nvSpPr>
-          <p:cNvPr id="28" name="gate-heading"/>
-          <p:cNvSpPr txBox="1"/>
-          <p:nvPr/>
-        </p:nvSpPr>
-        <p:spPr>
-          <a:xfrm>
-            <a:off x="6781800" y="2667000"/>
-            <a:ext cx="5080000" cy="266700"/>
-          </a:xfrm>
-          <a:prstGeom prst="rect">
-            <a:avLst/>
-          </a:prstGeom>
-          <a:noFill/>
-          <a:ln/>
-        </p:spPr>
-        <p:txBody>
-          <a:bodyPr wrap="square" lIns="12700" tIns="12700" rIns="12700" bIns="12700" rtlCol="0" anchor="t">
-            <a:noAutofit/>
-          </a:bodyPr>
-          <a:lstStyle/>
+            <a:endParaRPr lang="en-US" sz="1300" dirty="0" spc="0"/>
+          </a:p>
           <a:p>
             <a:pPr algn="l" indent="0" marL="0">
               <a:lnSpc>
@@ -3045,7 +3021,52 @@
               <a:defRPr spc="0"/>
             </a:pPr>
             <a:r>
-              <a:rPr lang="en-US" sz="1350" b="1" dirty="0" spc="0">
+              <a:rPr lang="en-US" sz="1300" dirty="0" spc="0">
+                <a:solidFill>
+                  <a:srgbClr val="000000"/>
+                </a:solidFill>
+                <a:latin typeface="Arial" pitchFamily="34" charset="0"/>
+                <a:ea typeface="Arial" pitchFamily="34" charset="-122"/>
+                <a:cs typeface="Arial" pitchFamily="34" charset="-120"/>
+              </a:rPr>
+              <a:t>only after the week-12 gate.</a:t>
+            </a:r>
+            <a:endParaRPr lang="en-US" sz="1300" dirty="0" spc="0"/>
+          </a:p>
+        </p:txBody>
+      </p:sp>
+      <p:sp>
+        <p:nvSpPr>
+          <p:cNvPr id="28" name="gate-heading"/>
+          <p:cNvSpPr txBox="1"/>
+          <p:nvPr/>
+        </p:nvSpPr>
+        <p:spPr>
+          <a:xfrm>
+            <a:off x="6731000" y="2927350"/>
+            <a:ext cx="5207000" cy="266700"/>
+          </a:xfrm>
+          <a:prstGeom prst="rect">
+            <a:avLst/>
+          </a:prstGeom>
+          <a:noFill/>
+          <a:ln/>
+        </p:spPr>
+        <p:txBody>
+          <a:bodyPr wrap="square" lIns="12700" tIns="12700" rIns="12700" bIns="12700" rtlCol="0" anchor="t">
+            <a:noAutofit/>
+          </a:bodyPr>
+          <a:lstStyle/>
+          <a:p>
+            <a:pPr algn="l" indent="0" marL="0">
+              <a:lnSpc>
+                <a:spcPct val="100000"/>
+              </a:lnSpc>
+              <a:buNone/>
+              <a:defRPr spc="0"/>
+            </a:pPr>
+            <a:r>
+              <a:rPr lang="en-US" sz="1400" b="1" dirty="0" spc="0">
                 <a:solidFill>
                   <a:srgbClr val="000000"/>
                 </a:solidFill>
@@ -3055,7 +3076,7 @@
               </a:rPr>
               <a:t>WEEK-12 SCALE GATE</a:t>
             </a:r>
-            <a:endParaRPr lang="en-US" sz="1350" dirty="0" spc="0"/>
+            <a:endParaRPr lang="en-US" sz="1400" dirty="0" spc="0"/>
           </a:p>
         </p:txBody>
       </p:sp>
@@ -3171,8 +3192,8 @@
         </p:blipFill>
         <p:spPr>
           <a:xfrm>
-            <a:off x="495300" y="3086100"/>
-            <a:ext cx="317500" cy="317500"/>
+            <a:off x="495300" y="3282950"/>
+            <a:ext cx="546100" cy="546100"/>
           </a:xfrm>
           <a:prstGeom prst="rect">
             <a:avLst/>
@@ -3201,8 +3222,8 @@
         </p:blipFill>
         <p:spPr>
           <a:xfrm>
-            <a:off x="495300" y="3765550"/>
-            <a:ext cx="317500" cy="317500"/>
+            <a:off x="495300" y="4070350"/>
+            <a:ext cx="546100" cy="546100"/>
           </a:xfrm>
           <a:prstGeom prst="rect">
             <a:avLst/>
@@ -3231,8 +3252,8 @@
         </p:blipFill>
         <p:spPr>
           <a:xfrm>
-            <a:off x="495300" y="4445000"/>
-            <a:ext cx="317500" cy="317500"/>
+            <a:off x="495300" y="4832350"/>
+            <a:ext cx="546100" cy="546100"/>
           </a:xfrm>
           <a:prstGeom prst="rect">
             <a:avLst/>
